--- a/02_Compare_FreeRTOS_vs_Zephyr/FreeRTOS_vs_Zephyr_비교.pptx
+++ b/02_Compare_FreeRTOS_vs_Zephyr/FreeRTOS_vs_Zephyr_비교.pptx
@@ -4,6 +4,9 @@
   <p:sldMasterIdLst>
     <p:sldMasterId id="2147483648" r:id="rId1"/>
   </p:sldMasterIdLst>
+  <p:notesMasterIdLst>
+    <p:notesMasterId r:id="rId16"/>
+  </p:notesMasterIdLst>
   <p:sldIdLst>
     <p:sldId id="256" r:id="rId2"/>
     <p:sldId id="257" r:id="rId3"/>
@@ -20,11 +23,8 @@
     <p:sldId id="268" r:id="rId14"/>
     <p:sldId id="269" r:id="rId15"/>
   </p:sldIdLst>
-  <p:notesMasterIdLst>
-    <p:notesMasterId r:id="rId16"/>
-  </p:notesMasterIdLst>
-  <p:sldSz cx="12188952" cy="6858000"/>
-  <p:notesSz cx="6858000" cy="12188952"/>
+  <p:sldSz cx="12188825" cy="6858000"/>
+  <p:notesSz cx="6858000" cy="12188825"/>
   <p:defaultTextStyle>
     <a:lvl1pPr marL="0" algn="l" defTabSz="914400" rtl="0" eaLnBrk="1" latinLnBrk="0" hangingPunct="1">
       <a:defRPr sz="1800" kern="1200">
@@ -117,6 +117,11 @@
       </a:defRPr>
     </a:lvl9pPr>
   </p:defaultTextStyle>
+  <p:extLst>
+    <p:ext uri="{EFAFB233-063F-42B5-8137-9DF3F51BA10A}">
+      <p15:sldGuideLst xmlns:p15="http://schemas.microsoft.com/office/powerpoint/2012/main"/>
+    </p:ext>
+  </p:extLst>
 </p:presentation>
 </file>
 
@@ -142,240 +147,16 @@
           <a:chExt cx="0" cy="0"/>
         </a:xfrm>
       </p:grpSpPr>
-      <p:sp>
-        <p:nvSpPr>
-          <p:cNvPr id="2" name="Header Placeholder 1"/>
-          <p:cNvSpPr>
-            <a:spLocks noGrp="1"/>
-          </p:cNvSpPr>
-          <p:nvPr>
-            <p:ph type="hdr" sz="quarter"/>
-          </p:nvPr>
-        </p:nvSpPr>
-        <p:spPr>
-          <a:xfrm>
-            <a:off x="0" y="0"/>
-            <a:ext cx="2971800" cy="458788"/>
-          </a:xfrm>
-          <a:prstGeom prst="rect">
-            <a:avLst/>
-          </a:prstGeom>
-        </p:spPr>
-        <p:txBody>
-          <a:bodyPr vert="horz" lIns="91440" tIns="45720" rIns="91440" bIns="45720" rtlCol="0"/>
-          <a:lstStyle>
-            <a:lvl1pPr algn="l">
-              <a:defRPr sz="1200"/>
-            </a:lvl1pPr>
-          </a:lstStyle>
-          <a:p>
-            <a:endParaRPr lang="en-US"/>
-          </a:p>
-        </p:txBody>
-      </p:sp>
-      <p:sp>
-        <p:nvSpPr>
-          <p:cNvPr id="3" name="Date Placeholder 2"/>
-          <p:cNvSpPr>
-            <a:spLocks noGrp="1"/>
-          </p:cNvSpPr>
-          <p:nvPr>
-            <p:ph type="dt" idx="1"/>
-          </p:nvPr>
-        </p:nvSpPr>
-        <p:spPr>
-          <a:xfrm>
-            <a:off x="3884613" y="0"/>
-            <a:ext cx="2971800" cy="458788"/>
-          </a:xfrm>
-          <a:prstGeom prst="rect">
-            <a:avLst/>
-          </a:prstGeom>
-        </p:spPr>
-        <p:txBody>
-          <a:bodyPr vert="horz" lIns="91440" tIns="45720" rIns="91440" bIns="45720" rtlCol="0"/>
-          <a:lstStyle>
-            <a:lvl1pPr algn="r">
-              <a:defRPr sz="1200"/>
-            </a:lvl1pPr>
-          </a:lstStyle>
-          <a:p>
-            <a:fld id="{5282F153-3F37-0F45-9E97-73ACFA13230C}" type="datetimeFigureOut">
-              <a:rPr lang="en-US"/>
-              <a:t>7/23/19</a:t>
-            </a:fld>
-            <a:endParaRPr lang="en-US"/>
-          </a:p>
-        </p:txBody>
-      </p:sp>
-      <p:sp>
-        <p:nvSpPr>
-          <p:cNvPr id="4" name="Slide Image Placeholder 3"/>
-          <p:cNvSpPr>
-            <a:spLocks noGrp="1" noRot="1" noChangeAspect="1"/>
-          </p:cNvSpPr>
-          <p:nvPr>
-            <p:ph type="sldImg" idx="2"/>
-          </p:nvPr>
-        </p:nvSpPr>
-        <p:spPr>
-          <a:xfrm>
-            <a:off x="685800" y="1143000"/>
-            <a:ext cx="5486400" cy="3086100"/>
-          </a:xfrm>
-          <a:prstGeom prst="rect">
-            <a:avLst/>
-          </a:prstGeom>
-          <a:noFill/>
-          <a:ln w="12700">
-            <a:solidFill>
-              <a:prstClr val="black"/>
-            </a:solidFill>
-          </a:ln>
-        </p:spPr>
-        <p:txBody>
-          <a:bodyPr vert="horz" lIns="91440" tIns="45720" rIns="91440" bIns="45720" rtlCol="0" anchor="ctr"/>
-          <a:lstStyle/>
-          <a:p>
-            <a:endParaRPr lang="en-US"/>
-          </a:p>
-        </p:txBody>
-      </p:sp>
-      <p:sp>
-        <p:nvSpPr>
-          <p:cNvPr id="5" name="Notes Placeholder 4"/>
-          <p:cNvSpPr>
-            <a:spLocks noGrp="1"/>
-          </p:cNvSpPr>
-          <p:nvPr>
-            <p:ph type="body" sz="quarter" idx="3"/>
-          </p:nvPr>
-        </p:nvSpPr>
-        <p:spPr>
-          <a:xfrm>
-            <a:off x="685800" y="4400550"/>
-            <a:ext cx="5486400" cy="3600450"/>
-          </a:xfrm>
-          <a:prstGeom prst="rect">
-            <a:avLst/>
-          </a:prstGeom>
-        </p:spPr>
-        <p:txBody>
-          <a:bodyPr vert="horz" lIns="91440" tIns="45720" rIns="91440" bIns="45720" rtlCol="0"/>
-          <a:lstStyle/>
-          <a:p>
-            <a:pPr lvl="0"/>
-            <a:r>
-              <a:rPr lang="en-US"/>
-              <a:t>Click to edit Master text styles</a:t>
-            </a:r>
-          </a:p>
-          <a:p>
-            <a:pPr lvl="1"/>
-            <a:r>
-              <a:rPr lang="en-US"/>
-              <a:t>Second level</a:t>
-            </a:r>
-          </a:p>
-          <a:p>
-            <a:pPr lvl="2"/>
-            <a:r>
-              <a:rPr lang="en-US"/>
-              <a:t>Third level</a:t>
-            </a:r>
-          </a:p>
-          <a:p>
-            <a:pPr lvl="3"/>
-            <a:r>
-              <a:rPr lang="en-US"/>
-              <a:t>Fourth level</a:t>
-            </a:r>
-          </a:p>
-          <a:p>
-            <a:pPr lvl="4"/>
-            <a:r>
-              <a:rPr lang="en-US"/>
-              <a:t>Fifth level</a:t>
-            </a:r>
-          </a:p>
-        </p:txBody>
-      </p:sp>
-      <p:sp>
-        <p:nvSpPr>
-          <p:cNvPr id="6" name="Footer Placeholder 5"/>
-          <p:cNvSpPr>
-            <a:spLocks noGrp="1"/>
-          </p:cNvSpPr>
-          <p:nvPr>
-            <p:ph type="ftr" sz="quarter" idx="4"/>
-          </p:nvPr>
-        </p:nvSpPr>
-        <p:spPr>
-          <a:xfrm>
-            <a:off x="0" y="8685213"/>
-            <a:ext cx="2971800" cy="458787"/>
-          </a:xfrm>
-          <a:prstGeom prst="rect">
-            <a:avLst/>
-          </a:prstGeom>
-        </p:spPr>
-        <p:txBody>
-          <a:bodyPr vert="horz" lIns="91440" tIns="45720" rIns="91440" bIns="45720" rtlCol="0" anchor="b"/>
-          <a:lstStyle>
-            <a:lvl1pPr algn="l">
-              <a:defRPr sz="1200"/>
-            </a:lvl1pPr>
-          </a:lstStyle>
-          <a:p>
-            <a:endParaRPr lang="en-US"/>
-          </a:p>
-        </p:txBody>
-      </p:sp>
-      <p:sp>
-        <p:nvSpPr>
-          <p:cNvPr id="7" name="Slide Number Placeholder 6"/>
-          <p:cNvSpPr>
-            <a:spLocks noGrp="1"/>
-          </p:cNvSpPr>
-          <p:nvPr>
-            <p:ph type="sldNum" sz="quarter" idx="5"/>
-          </p:nvPr>
-        </p:nvSpPr>
-        <p:spPr>
-          <a:xfrm>
-            <a:off x="3884613" y="8685213"/>
-            <a:ext cx="2971800" cy="458787"/>
-          </a:xfrm>
-          <a:prstGeom prst="rect">
-            <a:avLst/>
-          </a:prstGeom>
-        </p:spPr>
-        <p:txBody>
-          <a:bodyPr vert="horz" lIns="91440" tIns="45720" rIns="91440" bIns="45720" rtlCol="0" anchor="b"/>
-          <a:lstStyle>
-            <a:lvl1pPr algn="r">
-              <a:defRPr sz="1200"/>
-            </a:lvl1pPr>
-          </a:lstStyle>
-          <a:p>
-            <a:fld id="{CE5E9CC1-C706-0F49-92D6-E571CC5EEA8F}" type="slidenum">
-              <a:rPr lang="en-US"/>
-              <a:t>‹#›</a:t>
-            </a:fld>
-            <a:endParaRPr lang="en-US"/>
-          </a:p>
-        </p:txBody>
-      </p:sp>
     </p:spTree>
     <p:extLst>
       <p:ext uri="{BB962C8B-B14F-4D97-AF65-F5344CB8AC3E}">
-        <p14:creationId xmlns:p14="http://schemas.microsoft.com/office/powerpoint/2010/main" val="1024086991"/>
+        <p14:creationId xmlns:p14="http://schemas.microsoft.com/office/powerpoint/2010/main" val="4111509932"/>
       </p:ext>
     </p:extLst>
   </p:cSld>
   <p:clrMap bg1="lt1" tx1="dk1" bg2="lt2" tx2="dk2" accent1="accent1" accent2="accent2" accent3="accent3" accent4="accent4" accent5="accent5" accent6="accent6" hlink="hlink" folHlink="folHlink"/>
   <p:notesStyle>
-    <a:lvl1pPr marL="0" algn="l" defTabSz="914400" rtl="0" eaLnBrk="1" latinLnBrk="0" hangingPunct="1">
+    <a:lvl1pPr marL="0" algn="l" defTabSz="914400" rtl="0" eaLnBrk="1" latinLnBrk="1" hangingPunct="1">
       <a:defRPr sz="1200" kern="1200">
         <a:solidFill>
           <a:schemeClr val="tx1"/>
@@ -385,7 +166,7 @@
         <a:cs typeface="+mn-cs"/>
       </a:defRPr>
     </a:lvl1pPr>
-    <a:lvl2pPr marL="457200" algn="l" defTabSz="914400" rtl="0" eaLnBrk="1" latinLnBrk="0" hangingPunct="1">
+    <a:lvl2pPr marL="457200" algn="l" defTabSz="914400" rtl="0" eaLnBrk="1" latinLnBrk="1" hangingPunct="1">
       <a:defRPr sz="1200" kern="1200">
         <a:solidFill>
           <a:schemeClr val="tx1"/>
@@ -395,7 +176,7 @@
         <a:cs typeface="+mn-cs"/>
       </a:defRPr>
     </a:lvl2pPr>
-    <a:lvl3pPr marL="914400" algn="l" defTabSz="914400" rtl="0" eaLnBrk="1" latinLnBrk="0" hangingPunct="1">
+    <a:lvl3pPr marL="914400" algn="l" defTabSz="914400" rtl="0" eaLnBrk="1" latinLnBrk="1" hangingPunct="1">
       <a:defRPr sz="1200" kern="1200">
         <a:solidFill>
           <a:schemeClr val="tx1"/>
@@ -405,7 +186,7 @@
         <a:cs typeface="+mn-cs"/>
       </a:defRPr>
     </a:lvl3pPr>
-    <a:lvl4pPr marL="1371600" algn="l" defTabSz="914400" rtl="0" eaLnBrk="1" latinLnBrk="0" hangingPunct="1">
+    <a:lvl4pPr marL="1371600" algn="l" defTabSz="914400" rtl="0" eaLnBrk="1" latinLnBrk="1" hangingPunct="1">
       <a:defRPr sz="1200" kern="1200">
         <a:solidFill>
           <a:schemeClr val="tx1"/>
@@ -415,7 +196,7 @@
         <a:cs typeface="+mn-cs"/>
       </a:defRPr>
     </a:lvl4pPr>
-    <a:lvl5pPr marL="1828800" algn="l" defTabSz="914400" rtl="0" eaLnBrk="1" latinLnBrk="0" hangingPunct="1">
+    <a:lvl5pPr marL="1828800" algn="l" defTabSz="914400" rtl="0" eaLnBrk="1" latinLnBrk="1" hangingPunct="1">
       <a:defRPr sz="1200" kern="1200">
         <a:solidFill>
           <a:schemeClr val="tx1"/>
@@ -425,7 +206,7 @@
         <a:cs typeface="+mn-cs"/>
       </a:defRPr>
     </a:lvl5pPr>
-    <a:lvl6pPr marL="2286000" algn="l" defTabSz="914400" rtl="0" eaLnBrk="1" latinLnBrk="0" hangingPunct="1">
+    <a:lvl6pPr marL="2286000" algn="l" defTabSz="914400" rtl="0" eaLnBrk="1" latinLnBrk="1" hangingPunct="1">
       <a:defRPr sz="1200" kern="1200">
         <a:solidFill>
           <a:schemeClr val="tx1"/>
@@ -435,7 +216,7 @@
         <a:cs typeface="+mn-cs"/>
       </a:defRPr>
     </a:lvl6pPr>
-    <a:lvl7pPr marL="2743200" algn="l" defTabSz="914400" rtl="0" eaLnBrk="1" latinLnBrk="0" hangingPunct="1">
+    <a:lvl7pPr marL="2743200" algn="l" defTabSz="914400" rtl="0" eaLnBrk="1" latinLnBrk="1" hangingPunct="1">
       <a:defRPr sz="1200" kern="1200">
         <a:solidFill>
           <a:schemeClr val="tx1"/>
@@ -445,7 +226,7 @@
         <a:cs typeface="+mn-cs"/>
       </a:defRPr>
     </a:lvl7pPr>
-    <a:lvl8pPr marL="3200400" algn="l" defTabSz="914400" rtl="0" eaLnBrk="1" latinLnBrk="0" hangingPunct="1">
+    <a:lvl8pPr marL="3200400" algn="l" defTabSz="914400" rtl="0" eaLnBrk="1" latinLnBrk="1" hangingPunct="1">
       <a:defRPr sz="1200" kern="1200">
         <a:solidFill>
           <a:schemeClr val="tx1"/>
@@ -455,7 +236,7 @@
         <a:cs typeface="+mn-cs"/>
       </a:defRPr>
     </a:lvl8pPr>
-    <a:lvl9pPr marL="3657600" algn="l" defTabSz="914400" rtl="0" eaLnBrk="1" latinLnBrk="0" hangingPunct="1">
+    <a:lvl9pPr marL="3657600" algn="l" defTabSz="914400" rtl="0" eaLnBrk="1" latinLnBrk="1" hangingPunct="1">
       <a:defRPr sz="1200" kern="1200">
         <a:solidFill>
           <a:schemeClr val="tx1"/>
@@ -513,10 +294,6 @@
           <a:bodyPr/>
           <a:lstStyle/>
           <a:p>
-            <a:r>
-              <a:rPr lang="en-US" dirty="0"/>
-              <a:t/>
-            </a:r>
             <a:endParaRPr lang="en-US" dirty="0"/>
           </a:p>
         </p:txBody>
@@ -601,10 +378,6 @@
           <a:bodyPr/>
           <a:lstStyle/>
           <a:p>
-            <a:r>
-              <a:rPr lang="en-US" dirty="0"/>
-              <a:t/>
-            </a:r>
             <a:endParaRPr lang="en-US" dirty="0"/>
           </a:p>
         </p:txBody>
@@ -689,10 +462,6 @@
           <a:bodyPr/>
           <a:lstStyle/>
           <a:p>
-            <a:r>
-              <a:rPr lang="en-US" dirty="0"/>
-              <a:t/>
-            </a:r>
             <a:endParaRPr lang="en-US" dirty="0"/>
           </a:p>
         </p:txBody>
@@ -777,10 +546,6 @@
           <a:bodyPr/>
           <a:lstStyle/>
           <a:p>
-            <a:r>
-              <a:rPr lang="en-US" dirty="0"/>
-              <a:t/>
-            </a:r>
             <a:endParaRPr lang="en-US" dirty="0"/>
           </a:p>
         </p:txBody>
@@ -865,10 +630,6 @@
           <a:bodyPr/>
           <a:lstStyle/>
           <a:p>
-            <a:r>
-              <a:rPr lang="en-US" dirty="0"/>
-              <a:t/>
-            </a:r>
             <a:endParaRPr lang="en-US" dirty="0"/>
           </a:p>
         </p:txBody>
@@ -953,10 +714,6 @@
           <a:bodyPr/>
           <a:lstStyle/>
           <a:p>
-            <a:r>
-              <a:rPr lang="en-US" dirty="0"/>
-              <a:t/>
-            </a:r>
             <a:endParaRPr lang="en-US" dirty="0"/>
           </a:p>
         </p:txBody>
@@ -1041,10 +798,6 @@
           <a:bodyPr/>
           <a:lstStyle/>
           <a:p>
-            <a:r>
-              <a:rPr lang="en-US" dirty="0"/>
-              <a:t/>
-            </a:r>
             <a:endParaRPr lang="en-US" dirty="0"/>
           </a:p>
         </p:txBody>
@@ -1129,10 +882,6 @@
           <a:bodyPr/>
           <a:lstStyle/>
           <a:p>
-            <a:r>
-              <a:rPr lang="en-US" dirty="0"/>
-              <a:t/>
-            </a:r>
             <a:endParaRPr lang="en-US" dirty="0"/>
           </a:p>
         </p:txBody>
@@ -1217,10 +966,6 @@
           <a:bodyPr/>
           <a:lstStyle/>
           <a:p>
-            <a:r>
-              <a:rPr lang="en-US" dirty="0"/>
-              <a:t/>
-            </a:r>
             <a:endParaRPr lang="en-US" dirty="0"/>
           </a:p>
         </p:txBody>
@@ -1305,10 +1050,6 @@
           <a:bodyPr/>
           <a:lstStyle/>
           <a:p>
-            <a:r>
-              <a:rPr lang="en-US" dirty="0"/>
-              <a:t/>
-            </a:r>
             <a:endParaRPr lang="en-US" dirty="0"/>
           </a:p>
         </p:txBody>
@@ -1393,10 +1134,6 @@
           <a:bodyPr/>
           <a:lstStyle/>
           <a:p>
-            <a:r>
-              <a:rPr lang="en-US" dirty="0"/>
-              <a:t/>
-            </a:r>
             <a:endParaRPr lang="en-US" dirty="0"/>
           </a:p>
         </p:txBody>
@@ -1481,10 +1218,6 @@
           <a:bodyPr/>
           <a:lstStyle/>
           <a:p>
-            <a:r>
-              <a:rPr lang="en-US" dirty="0"/>
-              <a:t/>
-            </a:r>
             <a:endParaRPr lang="en-US" dirty="0"/>
           </a:p>
         </p:txBody>
@@ -1569,10 +1302,6 @@
           <a:bodyPr/>
           <a:lstStyle/>
           <a:p>
-            <a:r>
-              <a:rPr lang="en-US" dirty="0"/>
-              <a:t/>
-            </a:r>
             <a:endParaRPr lang="en-US" dirty="0"/>
           </a:p>
         </p:txBody>
@@ -1657,10 +1386,6 @@
           <a:bodyPr/>
           <a:lstStyle/>
           <a:p>
-            <a:r>
-              <a:rPr lang="en-US" dirty="0"/>
-              <a:t/>
-            </a:r>
             <a:endParaRPr lang="en-US" dirty="0"/>
           </a:p>
         </p:txBody>
@@ -1734,6 +1459,11 @@
 <file path=ppt/slideMasters/slideMaster1.xml><?xml version="1.0" encoding="utf-8"?>
 <p:sldMaster xmlns:a="http://schemas.openxmlformats.org/drawingml/2006/main" xmlns:r="http://schemas.openxmlformats.org/officeDocument/2006/relationships" xmlns:p="http://schemas.openxmlformats.org/presentationml/2006/main">
   <p:cSld>
+    <p:bg>
+      <p:bgRef idx="1001">
+        <a:schemeClr val="bg1"/>
+      </p:bgRef>
+    </p:bg>
     <p:spTree>
       <p:nvGrpSpPr>
         <p:cNvPr id="1" name=""/>
@@ -2016,6 +1746,7 @@
         <a:solidFill>
           <a:srgbClr val="183774"/>
         </a:solidFill>
+        <a:effectLst/>
       </p:bgPr>
     </p:bg>
     <p:spTree>
@@ -2034,45 +1765,6 @@
       </p:grpSpPr>
       <p:sp>
         <p:nvSpPr>
-          <p:cNvPr id="2" name="Text 0"/>
-          <p:cNvSpPr/>
-          <p:nvPr/>
-        </p:nvSpPr>
-        <p:spPr>
-          <a:xfrm>
-            <a:off x="9509760" y="320040"/>
-            <a:ext cx="2377440" cy="365760"/>
-          </a:xfrm>
-          <a:prstGeom prst="rect">
-            <a:avLst/>
-          </a:prstGeom>
-          <a:noFill/>
-          <a:ln/>
-        </p:spPr>
-        <p:txBody>
-          <a:bodyPr wrap="square" rtlCol="0" anchor="ctr"/>
-          <a:lstStyle/>
-          <a:p>
-            <a:pPr algn="r" indent="0" marL="0">
-              <a:buNone/>
-            </a:pPr>
-            <a:r>
-              <a:rPr lang="en-US" sz="1400" b="1" spc="200" kern="0" dirty="0">
-                <a:solidFill>
-                  <a:srgbClr val="247DFF"/>
-                </a:solidFill>
-                <a:latin typeface="Arial" pitchFamily="34" charset="0"/>
-                <a:ea typeface="Arial" pitchFamily="34" charset="-122"/>
-                <a:cs typeface="Arial" pitchFamily="34" charset="-120"/>
-              </a:rPr>
-              <a:t>SYNAPTICS</a:t>
-            </a:r>
-            <a:endParaRPr lang="en-US" sz="1400" dirty="0"/>
-          </a:p>
-        </p:txBody>
-      </p:sp>
-      <p:sp>
-        <p:nvSpPr>
           <p:cNvPr id="3" name="Text 1"/>
           <p:cNvSpPr/>
           <p:nvPr/>
@@ -2092,11 +1784,11 @@
           <a:bodyPr wrap="square" rtlCol="0" anchor="ctr"/>
           <a:lstStyle/>
           <a:p>
-            <a:pPr indent="0" marL="0">
-              <a:buNone/>
-            </a:pPr>
-            <a:r>
-              <a:rPr lang="en-US" sz="1800" b="1" spc="200" kern="0" dirty="0">
+            <a:pPr marL="0" indent="0">
+              <a:buNone/>
+            </a:pPr>
+            <a:r>
+              <a:rPr lang="en-US" sz="1800" b="1" kern="0" spc="200" dirty="0">
                 <a:solidFill>
                   <a:srgbClr val="247DFF"/>
                 </a:solidFill>
@@ -2131,7 +1823,7 @@
           <a:bodyPr wrap="square" rtlCol="0" anchor="ctr"/>
           <a:lstStyle/>
           <a:p>
-            <a:pPr indent="0" marL="0">
+            <a:pPr marL="0" indent="0">
               <a:buNone/>
             </a:pPr>
             <a:r>
@@ -2170,7 +1862,7 @@
           <a:bodyPr wrap="square" rtlCol="0" anchor="ctr"/>
           <a:lstStyle/>
           <a:p>
-            <a:pPr indent="0" marL="0">
+            <a:pPr marL="0" indent="0">
               <a:buNone/>
             </a:pPr>
             <a:r>
@@ -2229,7 +1921,7 @@
           <a:bodyPr wrap="square" rtlCol="0" anchor="ctr"/>
           <a:lstStyle/>
           <a:p>
-            <a:pPr indent="0" marL="0">
+            <a:pPr marL="0" indent="0">
               <a:buNone/>
             </a:pPr>
             <a:r>
@@ -2268,7 +1960,7 @@
           <a:bodyPr wrap="square" rtlCol="0" anchor="ctr"/>
           <a:lstStyle/>
           <a:p>
-            <a:pPr algn="r" indent="0" marL="0">
+            <a:pPr marL="0" indent="0" algn="r">
               <a:buNone/>
             </a:pPr>
             <a:r>
@@ -2302,6 +1994,7 @@
         <a:solidFill>
           <a:srgbClr val="183774"/>
         </a:solidFill>
+        <a:effectLst/>
       </p:bgPr>
     </p:bg>
     <p:spTree>
@@ -2320,45 +2013,6 @@
       </p:grpSpPr>
       <p:sp>
         <p:nvSpPr>
-          <p:cNvPr id="2" name="Text 0"/>
-          <p:cNvSpPr/>
-          <p:nvPr/>
-        </p:nvSpPr>
-        <p:spPr>
-          <a:xfrm>
-            <a:off x="9509760" y="320040"/>
-            <a:ext cx="2377440" cy="365760"/>
-          </a:xfrm>
-          <a:prstGeom prst="rect">
-            <a:avLst/>
-          </a:prstGeom>
-          <a:noFill/>
-          <a:ln/>
-        </p:spPr>
-        <p:txBody>
-          <a:bodyPr wrap="square" rtlCol="0" anchor="ctr"/>
-          <a:lstStyle/>
-          <a:p>
-            <a:pPr algn="r" indent="0" marL="0">
-              <a:buNone/>
-            </a:pPr>
-            <a:r>
-              <a:rPr lang="en-US" sz="1400" b="1" spc="200" kern="0" dirty="0">
-                <a:solidFill>
-                  <a:srgbClr val="247DFF"/>
-                </a:solidFill>
-                <a:latin typeface="Arial" pitchFamily="34" charset="0"/>
-                <a:ea typeface="Arial" pitchFamily="34" charset="-122"/>
-                <a:cs typeface="Arial" pitchFamily="34" charset="-120"/>
-              </a:rPr>
-              <a:t>SYNAPTICS</a:t>
-            </a:r>
-            <a:endParaRPr lang="en-US" sz="1400" dirty="0"/>
-          </a:p>
-        </p:txBody>
-      </p:sp>
-      <p:sp>
-        <p:nvSpPr>
           <p:cNvPr id="3" name="Text 1"/>
           <p:cNvSpPr/>
           <p:nvPr/>
@@ -2378,11 +2032,11 @@
           <a:bodyPr wrap="square" rtlCol="0" anchor="ctr"/>
           <a:lstStyle/>
           <a:p>
-            <a:pPr indent="0" marL="0">
-              <a:buNone/>
-            </a:pPr>
-            <a:r>
-              <a:rPr lang="en-US" sz="1300" b="1" spc="100" kern="0" dirty="0">
+            <a:pPr marL="0" indent="0">
+              <a:buNone/>
+            </a:pPr>
+            <a:r>
+              <a:rPr lang="en-US" sz="1300" b="1" kern="0" spc="100" dirty="0">
                 <a:solidFill>
                   <a:srgbClr val="247DFF"/>
                 </a:solidFill>
@@ -2417,7 +2071,7 @@
           <a:bodyPr wrap="square" rtlCol="0" anchor="ctr"/>
           <a:lstStyle/>
           <a:p>
-            <a:pPr indent="0" marL="0">
+            <a:pPr marL="0" indent="0">
               <a:buNone/>
             </a:pPr>
             <a:r>
@@ -2478,7 +2132,7 @@
           <a:bodyPr wrap="square" rtlCol="0" anchor="ctr"/>
           <a:lstStyle/>
           <a:p>
-            <a:pPr indent="0" marL="0">
+            <a:pPr marL="0" indent="0">
               <a:buNone/>
             </a:pPr>
             <a:r>
@@ -2517,7 +2171,7 @@
           <a:bodyPr wrap="square" rtlCol="0" anchor="ctr"/>
           <a:lstStyle/>
           <a:p>
-            <a:pPr indent="0" marL="0">
+            <a:pPr marL="0" indent="0">
               <a:buNone/>
             </a:pPr>
             <a:r>
@@ -2578,7 +2232,7 @@
           <a:bodyPr wrap="square" rtlCol="0" anchor="ctr"/>
           <a:lstStyle/>
           <a:p>
-            <a:pPr indent="0" marL="0">
+            <a:pPr marL="0" indent="0">
               <a:buNone/>
             </a:pPr>
             <a:r>
@@ -2617,7 +2271,7 @@
           <a:bodyPr wrap="square" rtlCol="0" anchor="ctr"/>
           <a:lstStyle/>
           <a:p>
-            <a:pPr indent="0" marL="0">
+            <a:pPr marL="0" indent="0">
               <a:buNone/>
             </a:pPr>
             <a:r>
@@ -2678,7 +2332,7 @@
           <a:bodyPr wrap="square" rtlCol="0" anchor="ctr"/>
           <a:lstStyle/>
           <a:p>
-            <a:pPr indent="0" marL="0">
+            <a:pPr marL="0" indent="0">
               <a:buNone/>
             </a:pPr>
             <a:r>
@@ -2717,7 +2371,7 @@
           <a:bodyPr wrap="square" rtlCol="0" anchor="ctr"/>
           <a:lstStyle/>
           <a:p>
-            <a:pPr indent="0" marL="0">
+            <a:pPr marL="0" indent="0">
               <a:buNone/>
             </a:pPr>
             <a:r>
@@ -2778,7 +2432,7 @@
           <a:bodyPr wrap="square" rtlCol="0" anchor="ctr"/>
           <a:lstStyle/>
           <a:p>
-            <a:pPr indent="0" marL="0">
+            <a:pPr marL="0" indent="0">
               <a:buNone/>
             </a:pPr>
             <a:r>
@@ -2817,7 +2471,7 @@
           <a:bodyPr wrap="square" rtlCol="0" anchor="ctr"/>
           <a:lstStyle/>
           <a:p>
-            <a:pPr indent="0" marL="0">
+            <a:pPr marL="0" indent="0">
               <a:buNone/>
             </a:pPr>
             <a:r>
@@ -2878,7 +2532,7 @@
           <a:bodyPr wrap="square" rtlCol="0" anchor="ctr"/>
           <a:lstStyle/>
           <a:p>
-            <a:pPr indent="0" marL="0">
+            <a:pPr marL="0" indent="0">
               <a:buNone/>
             </a:pPr>
             <a:r>
@@ -2917,7 +2571,7 @@
           <a:bodyPr wrap="square" rtlCol="0" anchor="ctr"/>
           <a:lstStyle/>
           <a:p>
-            <a:pPr indent="0" marL="0">
+            <a:pPr marL="0" indent="0">
               <a:buNone/>
             </a:pPr>
             <a:r>
@@ -2978,7 +2632,7 @@
           <a:bodyPr wrap="square" rtlCol="0" anchor="ctr"/>
           <a:lstStyle/>
           <a:p>
-            <a:pPr indent="0" marL="0">
+            <a:pPr marL="0" indent="0">
               <a:buNone/>
             </a:pPr>
             <a:r>
@@ -3017,7 +2671,7 @@
           <a:bodyPr wrap="square" rtlCol="0" anchor="ctr"/>
           <a:lstStyle/>
           <a:p>
-            <a:pPr indent="0" marL="0">
+            <a:pPr marL="0" indent="0">
               <a:buNone/>
             </a:pPr>
             <a:r>
@@ -3056,7 +2710,7 @@
           <a:bodyPr wrap="square" rtlCol="0" anchor="ctr"/>
           <a:lstStyle/>
           <a:p>
-            <a:pPr indent="0" marL="0">
+            <a:pPr marL="0" indent="0">
               <a:buNone/>
             </a:pPr>
             <a:r>
@@ -3095,7 +2749,7 @@
           <a:bodyPr wrap="square" rtlCol="0" anchor="ctr"/>
           <a:lstStyle/>
           <a:p>
-            <a:pPr algn="r" indent="0" marL="0">
+            <a:pPr marL="0" indent="0" algn="r">
               <a:buNone/>
             </a:pPr>
             <a:r>
@@ -3129,6 +2783,7 @@
         <a:solidFill>
           <a:srgbClr val="183774"/>
         </a:solidFill>
+        <a:effectLst/>
       </p:bgPr>
     </p:bg>
     <p:spTree>
@@ -3147,45 +2802,6 @@
       </p:grpSpPr>
       <p:sp>
         <p:nvSpPr>
-          <p:cNvPr id="2" name="Text 0"/>
-          <p:cNvSpPr/>
-          <p:nvPr/>
-        </p:nvSpPr>
-        <p:spPr>
-          <a:xfrm>
-            <a:off x="9509760" y="320040"/>
-            <a:ext cx="2377440" cy="365760"/>
-          </a:xfrm>
-          <a:prstGeom prst="rect">
-            <a:avLst/>
-          </a:prstGeom>
-          <a:noFill/>
-          <a:ln/>
-        </p:spPr>
-        <p:txBody>
-          <a:bodyPr wrap="square" rtlCol="0" anchor="ctr"/>
-          <a:lstStyle/>
-          <a:p>
-            <a:pPr algn="r" indent="0" marL="0">
-              <a:buNone/>
-            </a:pPr>
-            <a:r>
-              <a:rPr lang="en-US" sz="1400" b="1" spc="200" kern="0" dirty="0">
-                <a:solidFill>
-                  <a:srgbClr val="247DFF"/>
-                </a:solidFill>
-                <a:latin typeface="Arial" pitchFamily="34" charset="0"/>
-                <a:ea typeface="Arial" pitchFamily="34" charset="-122"/>
-                <a:cs typeface="Arial" pitchFamily="34" charset="-120"/>
-              </a:rPr>
-              <a:t>SYNAPTICS</a:t>
-            </a:r>
-            <a:endParaRPr lang="en-US" sz="1400" dirty="0"/>
-          </a:p>
-        </p:txBody>
-      </p:sp>
-      <p:sp>
-        <p:nvSpPr>
           <p:cNvPr id="3" name="Text 1"/>
           <p:cNvSpPr/>
           <p:nvPr/>
@@ -3205,11 +2821,11 @@
           <a:bodyPr wrap="square" rtlCol="0" anchor="ctr"/>
           <a:lstStyle/>
           <a:p>
-            <a:pPr indent="0" marL="0">
-              <a:buNone/>
-            </a:pPr>
-            <a:r>
-              <a:rPr lang="en-US" sz="1300" b="1" spc="100" kern="0" dirty="0">
+            <a:pPr marL="0" indent="0">
+              <a:buNone/>
+            </a:pPr>
+            <a:r>
+              <a:rPr lang="en-US" sz="1300" b="1" kern="0" spc="100" dirty="0">
                 <a:solidFill>
                   <a:srgbClr val="247DFF"/>
                 </a:solidFill>
@@ -3244,7 +2860,7 @@
           <a:bodyPr wrap="square" rtlCol="0" anchor="ctr"/>
           <a:lstStyle/>
           <a:p>
-            <a:pPr indent="0" marL="0">
+            <a:pPr marL="0" indent="0">
               <a:buNone/>
             </a:pPr>
             <a:r>
@@ -3305,7 +2921,7 @@
           <a:bodyPr wrap="square" rtlCol="0" anchor="ctr"/>
           <a:lstStyle/>
           <a:p>
-            <a:pPr indent="0" marL="0">
+            <a:pPr marL="0" indent="0">
               <a:buNone/>
             </a:pPr>
             <a:r>
@@ -3344,7 +2960,7 @@
           <a:bodyPr wrap="square" rtlCol="0" anchor="ctr"/>
           <a:lstStyle/>
           <a:p>
-            <a:pPr indent="0" marL="0">
+            <a:pPr marL="0" indent="0">
               <a:buNone/>
             </a:pPr>
             <a:r>
@@ -3405,7 +3021,7 @@
           <a:bodyPr wrap="square" rtlCol="0" anchor="ctr"/>
           <a:lstStyle/>
           <a:p>
-            <a:pPr indent="0" marL="0">
+            <a:pPr marL="0" indent="0">
               <a:buNone/>
             </a:pPr>
             <a:r>
@@ -3444,7 +3060,7 @@
           <a:bodyPr wrap="square" rtlCol="0" anchor="ctr"/>
           <a:lstStyle/>
           <a:p>
-            <a:pPr indent="0" marL="0">
+            <a:pPr marL="0" indent="0">
               <a:buNone/>
             </a:pPr>
             <a:r>
@@ -3505,7 +3121,7 @@
           <a:bodyPr wrap="square" rtlCol="0" anchor="ctr"/>
           <a:lstStyle/>
           <a:p>
-            <a:pPr indent="0" marL="0">
+            <a:pPr marL="0" indent="0">
               <a:buNone/>
             </a:pPr>
             <a:r>
@@ -3544,7 +3160,7 @@
           <a:bodyPr wrap="square" rtlCol="0" anchor="ctr"/>
           <a:lstStyle/>
           <a:p>
-            <a:pPr indent="0" marL="0">
+            <a:pPr marL="0" indent="0">
               <a:buNone/>
             </a:pPr>
             <a:r>
@@ -3605,7 +3221,7 @@
           <a:bodyPr wrap="square" rtlCol="0" anchor="ctr"/>
           <a:lstStyle/>
           <a:p>
-            <a:pPr indent="0" marL="0">
+            <a:pPr marL="0" indent="0">
               <a:buNone/>
             </a:pPr>
             <a:r>
@@ -3644,7 +3260,7 @@
           <a:bodyPr wrap="square" rtlCol="0" anchor="ctr"/>
           <a:lstStyle/>
           <a:p>
-            <a:pPr indent="0" marL="0">
+            <a:pPr marL="0" indent="0">
               <a:buNone/>
             </a:pPr>
             <a:r>
@@ -3705,7 +3321,7 @@
           <a:bodyPr wrap="square" rtlCol="0" anchor="ctr"/>
           <a:lstStyle/>
           <a:p>
-            <a:pPr indent="0" marL="0">
+            <a:pPr marL="0" indent="0">
               <a:buNone/>
             </a:pPr>
             <a:r>
@@ -3744,7 +3360,7 @@
           <a:bodyPr wrap="square" rtlCol="0" anchor="ctr"/>
           <a:lstStyle/>
           <a:p>
-            <a:pPr indent="0" marL="0">
+            <a:pPr marL="0" indent="0">
               <a:buNone/>
             </a:pPr>
             <a:r>
@@ -3805,7 +3421,7 @@
           <a:bodyPr wrap="square" rtlCol="0" anchor="ctr"/>
           <a:lstStyle/>
           <a:p>
-            <a:pPr indent="0" marL="0">
+            <a:pPr marL="0" indent="0">
               <a:buNone/>
             </a:pPr>
             <a:r>
@@ -3844,7 +3460,7 @@
           <a:bodyPr wrap="square" rtlCol="0" anchor="ctr"/>
           <a:lstStyle/>
           <a:p>
-            <a:pPr indent="0" marL="0">
+            <a:pPr marL="0" indent="0">
               <a:buNone/>
             </a:pPr>
             <a:r>
@@ -3883,7 +3499,7 @@
           <a:bodyPr wrap="square" rtlCol="0" anchor="ctr"/>
           <a:lstStyle/>
           <a:p>
-            <a:pPr indent="0" marL="0">
+            <a:pPr marL="0" indent="0">
               <a:buNone/>
             </a:pPr>
             <a:r>
@@ -3922,7 +3538,7 @@
           <a:bodyPr wrap="square" rtlCol="0" anchor="ctr"/>
           <a:lstStyle/>
           <a:p>
-            <a:pPr algn="r" indent="0" marL="0">
+            <a:pPr marL="0" indent="0" algn="r">
               <a:buNone/>
             </a:pPr>
             <a:r>
@@ -3956,6 +3572,7 @@
         <a:solidFill>
           <a:srgbClr val="183774"/>
         </a:solidFill>
+        <a:effectLst/>
       </p:bgPr>
     </p:bg>
     <p:spTree>
@@ -3974,45 +3591,6 @@
       </p:grpSpPr>
       <p:sp>
         <p:nvSpPr>
-          <p:cNvPr id="2" name="Text 0"/>
-          <p:cNvSpPr/>
-          <p:nvPr/>
-        </p:nvSpPr>
-        <p:spPr>
-          <a:xfrm>
-            <a:off x="9509760" y="320040"/>
-            <a:ext cx="2377440" cy="365760"/>
-          </a:xfrm>
-          <a:prstGeom prst="rect">
-            <a:avLst/>
-          </a:prstGeom>
-          <a:noFill/>
-          <a:ln/>
-        </p:spPr>
-        <p:txBody>
-          <a:bodyPr wrap="square" rtlCol="0" anchor="ctr"/>
-          <a:lstStyle/>
-          <a:p>
-            <a:pPr algn="r" indent="0" marL="0">
-              <a:buNone/>
-            </a:pPr>
-            <a:r>
-              <a:rPr lang="en-US" sz="1400" b="1" spc="200" kern="0" dirty="0">
-                <a:solidFill>
-                  <a:srgbClr val="247DFF"/>
-                </a:solidFill>
-                <a:latin typeface="Arial" pitchFamily="34" charset="0"/>
-                <a:ea typeface="Arial" pitchFamily="34" charset="-122"/>
-                <a:cs typeface="Arial" pitchFamily="34" charset="-120"/>
-              </a:rPr>
-              <a:t>SYNAPTICS</a:t>
-            </a:r>
-            <a:endParaRPr lang="en-US" sz="1400" dirty="0"/>
-          </a:p>
-        </p:txBody>
-      </p:sp>
-      <p:sp>
-        <p:nvSpPr>
           <p:cNvPr id="3" name="Text 1"/>
           <p:cNvSpPr/>
           <p:nvPr/>
@@ -4032,11 +3610,11 @@
           <a:bodyPr wrap="square" rtlCol="0" anchor="ctr"/>
           <a:lstStyle/>
           <a:p>
-            <a:pPr indent="0" marL="0">
-              <a:buNone/>
-            </a:pPr>
-            <a:r>
-              <a:rPr lang="en-US" sz="1300" b="1" spc="100" kern="0" dirty="0">
+            <a:pPr marL="0" indent="0">
+              <a:buNone/>
+            </a:pPr>
+            <a:r>
+              <a:rPr lang="en-US" sz="1300" b="1" kern="0" spc="100" dirty="0">
                 <a:solidFill>
                   <a:srgbClr val="247DFF"/>
                 </a:solidFill>
@@ -4071,7 +3649,7 @@
           <a:bodyPr wrap="square" rtlCol="0" anchor="ctr"/>
           <a:lstStyle/>
           <a:p>
-            <a:pPr indent="0" marL="0">
+            <a:pPr marL="0" indent="0">
               <a:buNone/>
             </a:pPr>
             <a:r>
@@ -4132,7 +3710,7 @@
           <a:bodyPr wrap="square" rtlCol="0" anchor="ctr"/>
           <a:lstStyle/>
           <a:p>
-            <a:pPr indent="0" marL="0">
+            <a:pPr marL="0" indent="0">
               <a:buNone/>
             </a:pPr>
             <a:r>
@@ -4171,7 +3749,7 @@
           <a:bodyPr wrap="square" rtlCol="0" anchor="ctr"/>
           <a:lstStyle/>
           <a:p>
-            <a:pPr indent="0" marL="0">
+            <a:pPr marL="0" indent="0">
               <a:buNone/>
             </a:pPr>
             <a:r>
@@ -4232,7 +3810,7 @@
           <a:bodyPr wrap="square" rtlCol="0" anchor="ctr"/>
           <a:lstStyle/>
           <a:p>
-            <a:pPr indent="0" marL="0">
+            <a:pPr marL="0" indent="0">
               <a:buNone/>
             </a:pPr>
             <a:r>
@@ -4271,7 +3849,7 @@
           <a:bodyPr wrap="square" rtlCol="0" anchor="ctr"/>
           <a:lstStyle/>
           <a:p>
-            <a:pPr indent="0" marL="0">
+            <a:pPr marL="0" indent="0">
               <a:buNone/>
             </a:pPr>
             <a:r>
@@ -4332,7 +3910,7 @@
           <a:bodyPr wrap="square" rtlCol="0" anchor="ctr"/>
           <a:lstStyle/>
           <a:p>
-            <a:pPr indent="0" marL="0">
+            <a:pPr marL="0" indent="0">
               <a:buNone/>
             </a:pPr>
             <a:r>
@@ -4371,7 +3949,7 @@
           <a:bodyPr wrap="square" rtlCol="0" anchor="ctr"/>
           <a:lstStyle/>
           <a:p>
-            <a:pPr indent="0" marL="0">
+            <a:pPr marL="0" indent="0">
               <a:buNone/>
             </a:pPr>
             <a:r>
@@ -4432,7 +4010,7 @@
           <a:bodyPr wrap="square" rtlCol="0" anchor="ctr"/>
           <a:lstStyle/>
           <a:p>
-            <a:pPr indent="0" marL="0">
+            <a:pPr marL="0" indent="0">
               <a:buNone/>
             </a:pPr>
             <a:r>
@@ -4471,7 +4049,7 @@
           <a:bodyPr wrap="square" rtlCol="0" anchor="ctr"/>
           <a:lstStyle/>
           <a:p>
-            <a:pPr indent="0" marL="0">
+            <a:pPr marL="0" indent="0">
               <a:buNone/>
             </a:pPr>
             <a:r>
@@ -4532,7 +4110,7 @@
           <a:bodyPr wrap="square" rtlCol="0" anchor="ctr"/>
           <a:lstStyle/>
           <a:p>
-            <a:pPr indent="0" marL="0">
+            <a:pPr marL="0" indent="0">
               <a:buNone/>
             </a:pPr>
             <a:r>
@@ -4571,7 +4149,7 @@
           <a:bodyPr wrap="square" rtlCol="0" anchor="ctr"/>
           <a:lstStyle/>
           <a:p>
-            <a:pPr indent="0" marL="0">
+            <a:pPr marL="0" indent="0">
               <a:buNone/>
             </a:pPr>
             <a:r>
@@ -4632,7 +4210,7 @@
           <a:bodyPr wrap="square" rtlCol="0" anchor="ctr"/>
           <a:lstStyle/>
           <a:p>
-            <a:pPr indent="0" marL="0">
+            <a:pPr marL="0" indent="0">
               <a:buNone/>
             </a:pPr>
             <a:r>
@@ -4671,7 +4249,7 @@
           <a:bodyPr wrap="square" rtlCol="0" anchor="ctr"/>
           <a:lstStyle/>
           <a:p>
-            <a:pPr indent="0" marL="0">
+            <a:pPr marL="0" indent="0">
               <a:buNone/>
             </a:pPr>
             <a:r>
@@ -4710,7 +4288,7 @@
           <a:bodyPr wrap="square" rtlCol="0" anchor="ctr"/>
           <a:lstStyle/>
           <a:p>
-            <a:pPr indent="0" marL="0">
+            <a:pPr marL="0" indent="0">
               <a:buNone/>
             </a:pPr>
             <a:r>
@@ -4749,7 +4327,7 @@
           <a:bodyPr wrap="square" rtlCol="0" anchor="ctr"/>
           <a:lstStyle/>
           <a:p>
-            <a:pPr algn="r" indent="0" marL="0">
+            <a:pPr marL="0" indent="0" algn="r">
               <a:buNone/>
             </a:pPr>
             <a:r>
@@ -4783,6 +4361,7 @@
         <a:solidFill>
           <a:srgbClr val="183774"/>
         </a:solidFill>
+        <a:effectLst/>
       </p:bgPr>
     </p:bg>
     <p:spTree>
@@ -4801,45 +4380,6 @@
       </p:grpSpPr>
       <p:sp>
         <p:nvSpPr>
-          <p:cNvPr id="2" name="Text 0"/>
-          <p:cNvSpPr/>
-          <p:nvPr/>
-        </p:nvSpPr>
-        <p:spPr>
-          <a:xfrm>
-            <a:off x="9509760" y="320040"/>
-            <a:ext cx="2377440" cy="365760"/>
-          </a:xfrm>
-          <a:prstGeom prst="rect">
-            <a:avLst/>
-          </a:prstGeom>
-          <a:noFill/>
-          <a:ln/>
-        </p:spPr>
-        <p:txBody>
-          <a:bodyPr wrap="square" rtlCol="0" anchor="ctr"/>
-          <a:lstStyle/>
-          <a:p>
-            <a:pPr algn="r" indent="0" marL="0">
-              <a:buNone/>
-            </a:pPr>
-            <a:r>
-              <a:rPr lang="en-US" sz="1400" b="1" spc="200" kern="0" dirty="0">
-                <a:solidFill>
-                  <a:srgbClr val="247DFF"/>
-                </a:solidFill>
-                <a:latin typeface="Arial" pitchFamily="34" charset="0"/>
-                <a:ea typeface="Arial" pitchFamily="34" charset="-122"/>
-                <a:cs typeface="Arial" pitchFamily="34" charset="-120"/>
-              </a:rPr>
-              <a:t>SYNAPTICS</a:t>
-            </a:r>
-            <a:endParaRPr lang="en-US" sz="1400" dirty="0"/>
-          </a:p>
-        </p:txBody>
-      </p:sp>
-      <p:sp>
-        <p:nvSpPr>
           <p:cNvPr id="3" name="Text 1"/>
           <p:cNvSpPr/>
           <p:nvPr/>
@@ -4859,11 +4399,11 @@
           <a:bodyPr wrap="square" rtlCol="0" anchor="ctr"/>
           <a:lstStyle/>
           <a:p>
-            <a:pPr indent="0" marL="0">
-              <a:buNone/>
-            </a:pPr>
-            <a:r>
-              <a:rPr lang="en-US" sz="1300" b="1" spc="100" kern="0" dirty="0">
+            <a:pPr marL="0" indent="0">
+              <a:buNone/>
+            </a:pPr>
+            <a:r>
+              <a:rPr lang="en-US" sz="1300" b="1" kern="0" spc="100" dirty="0">
                 <a:solidFill>
                   <a:srgbClr val="247DFF"/>
                 </a:solidFill>
@@ -4898,7 +4438,7 @@
           <a:bodyPr wrap="square" rtlCol="0" anchor="ctr"/>
           <a:lstStyle/>
           <a:p>
-            <a:pPr indent="0" marL="0">
+            <a:pPr marL="0" indent="0">
               <a:buNone/>
             </a:pPr>
             <a:r>
@@ -4959,7 +4499,7 @@
           <a:bodyPr wrap="square" rtlCol="0" anchor="ctr"/>
           <a:lstStyle/>
           <a:p>
-            <a:pPr indent="0" marL="0">
+            <a:pPr marL="0" indent="0">
               <a:buNone/>
             </a:pPr>
             <a:r>
@@ -4998,7 +4538,7 @@
           <a:bodyPr wrap="square" rtlCol="0" anchor="ctr"/>
           <a:lstStyle/>
           <a:p>
-            <a:pPr indent="0" marL="0">
+            <a:pPr marL="0" indent="0">
               <a:buNone/>
             </a:pPr>
             <a:r>
@@ -5059,7 +4599,7 @@
           <a:bodyPr wrap="square" rtlCol="0" anchor="ctr"/>
           <a:lstStyle/>
           <a:p>
-            <a:pPr indent="0" marL="0">
+            <a:pPr marL="0" indent="0">
               <a:buNone/>
             </a:pPr>
             <a:r>
@@ -5098,7 +4638,7 @@
           <a:bodyPr wrap="square" rtlCol="0" anchor="ctr"/>
           <a:lstStyle/>
           <a:p>
-            <a:pPr indent="0" marL="0">
+            <a:pPr marL="0" indent="0">
               <a:buNone/>
             </a:pPr>
             <a:r>
@@ -5159,7 +4699,7 @@
           <a:bodyPr wrap="square" rtlCol="0" anchor="ctr"/>
           <a:lstStyle/>
           <a:p>
-            <a:pPr indent="0" marL="0">
+            <a:pPr marL="0" indent="0">
               <a:buNone/>
             </a:pPr>
             <a:r>
@@ -5198,7 +4738,7 @@
           <a:bodyPr wrap="square" rtlCol="0" anchor="ctr"/>
           <a:lstStyle/>
           <a:p>
-            <a:pPr indent="0" marL="0">
+            <a:pPr marL="0" indent="0">
               <a:buNone/>
             </a:pPr>
             <a:r>
@@ -5259,7 +4799,7 @@
           <a:bodyPr wrap="square" rtlCol="0" anchor="ctr"/>
           <a:lstStyle/>
           <a:p>
-            <a:pPr indent="0" marL="0">
+            <a:pPr marL="0" indent="0">
               <a:buNone/>
             </a:pPr>
             <a:r>
@@ -5298,7 +4838,7 @@
           <a:bodyPr wrap="square" rtlCol="0" anchor="ctr"/>
           <a:lstStyle/>
           <a:p>
-            <a:pPr indent="0" marL="0">
+            <a:pPr marL="0" indent="0">
               <a:buNone/>
             </a:pPr>
             <a:r>
@@ -5359,7 +4899,7 @@
           <a:bodyPr wrap="square" rtlCol="0" anchor="ctr"/>
           <a:lstStyle/>
           <a:p>
-            <a:pPr indent="0" marL="0">
+            <a:pPr marL="0" indent="0">
               <a:buNone/>
             </a:pPr>
             <a:r>
@@ -5398,7 +4938,7 @@
           <a:bodyPr wrap="square" rtlCol="0" anchor="ctr"/>
           <a:lstStyle/>
           <a:p>
-            <a:pPr indent="0" marL="0">
+            <a:pPr marL="0" indent="0">
               <a:buNone/>
             </a:pPr>
             <a:r>
@@ -5424,7 +4964,7 @@
         </p:nvSpPr>
         <p:spPr>
           <a:xfrm>
-            <a:off x="548640" y="5989320"/>
+            <a:off x="548640" y="6125777"/>
             <a:ext cx="11064240" cy="365760"/>
           </a:xfrm>
           <a:prstGeom prst="rect">
@@ -5437,7 +4977,7 @@
           <a:bodyPr wrap="square" rtlCol="0" anchor="ctr"/>
           <a:lstStyle/>
           <a:p>
-            <a:pPr indent="0" marL="0">
+            <a:pPr marL="0" indent="0">
               <a:buNone/>
             </a:pPr>
             <a:r>
@@ -5476,7 +5016,7 @@
           <a:bodyPr wrap="square" rtlCol="0" anchor="ctr"/>
           <a:lstStyle/>
           <a:p>
-            <a:pPr indent="0" marL="0">
+            <a:pPr marL="0" indent="0">
               <a:buNone/>
             </a:pPr>
             <a:r>
@@ -5515,7 +5055,7 @@
           <a:bodyPr wrap="square" rtlCol="0" anchor="ctr"/>
           <a:lstStyle/>
           <a:p>
-            <a:pPr algn="r" indent="0" marL="0">
+            <a:pPr marL="0" indent="0" algn="r">
               <a:buNone/>
             </a:pPr>
             <a:r>
@@ -5549,6 +5089,7 @@
         <a:solidFill>
           <a:srgbClr val="183774"/>
         </a:solidFill>
+        <a:effectLst/>
       </p:bgPr>
     </p:bg>
     <p:spTree>
@@ -5567,45 +5108,6 @@
       </p:grpSpPr>
       <p:sp>
         <p:nvSpPr>
-          <p:cNvPr id="2" name="Text 0"/>
-          <p:cNvSpPr/>
-          <p:nvPr/>
-        </p:nvSpPr>
-        <p:spPr>
-          <a:xfrm>
-            <a:off x="9509760" y="320040"/>
-            <a:ext cx="2377440" cy="365760"/>
-          </a:xfrm>
-          <a:prstGeom prst="rect">
-            <a:avLst/>
-          </a:prstGeom>
-          <a:noFill/>
-          <a:ln/>
-        </p:spPr>
-        <p:txBody>
-          <a:bodyPr wrap="square" rtlCol="0" anchor="ctr"/>
-          <a:lstStyle/>
-          <a:p>
-            <a:pPr algn="r" indent="0" marL="0">
-              <a:buNone/>
-            </a:pPr>
-            <a:r>
-              <a:rPr lang="en-US" sz="1400" b="1" spc="200" kern="0" dirty="0">
-                <a:solidFill>
-                  <a:srgbClr val="247DFF"/>
-                </a:solidFill>
-                <a:latin typeface="Arial" pitchFamily="34" charset="0"/>
-                <a:ea typeface="Arial" pitchFamily="34" charset="-122"/>
-                <a:cs typeface="Arial" pitchFamily="34" charset="-120"/>
-              </a:rPr>
-              <a:t>SYNAPTICS</a:t>
-            </a:r>
-            <a:endParaRPr lang="en-US" sz="1400" dirty="0"/>
-          </a:p>
-        </p:txBody>
-      </p:sp>
-      <p:sp>
-        <p:nvSpPr>
           <p:cNvPr id="3" name="Text 1"/>
           <p:cNvSpPr/>
           <p:nvPr/>
@@ -5625,11 +5127,11 @@
           <a:bodyPr wrap="square" rtlCol="0" anchor="ctr"/>
           <a:lstStyle/>
           <a:p>
-            <a:pPr indent="0" marL="0">
-              <a:buNone/>
-            </a:pPr>
-            <a:r>
-              <a:rPr lang="en-US" sz="1300" b="1" spc="100" kern="0" dirty="0">
+            <a:pPr marL="0" indent="0">
+              <a:buNone/>
+            </a:pPr>
+            <a:r>
+              <a:rPr lang="en-US" sz="1300" b="1" kern="0" spc="100" dirty="0">
                 <a:solidFill>
                   <a:srgbClr val="247DFF"/>
                 </a:solidFill>
@@ -5664,7 +5166,7 @@
           <a:bodyPr wrap="square" rtlCol="0" anchor="ctr"/>
           <a:lstStyle/>
           <a:p>
-            <a:pPr indent="0" marL="0">
+            <a:pPr marL="0" indent="0">
               <a:buNone/>
             </a:pPr>
             <a:r>
@@ -5745,7 +5247,7 @@
           <a:bodyPr wrap="square" rtlCol="0" anchor="ctr"/>
           <a:lstStyle/>
           <a:p>
-            <a:pPr indent="0" marL="0">
+            <a:pPr marL="0" indent="0">
               <a:buNone/>
             </a:pPr>
             <a:r>
@@ -5804,7 +5306,7 @@
           <a:bodyPr wrap="square" rtlCol="0" anchor="t"/>
           <a:lstStyle/>
           <a:p>
-            <a:pPr indent="0" marL="0">
+            <a:pPr marL="0" indent="0">
               <a:buNone/>
             </a:pPr>
             <a:r>
@@ -5863,7 +5365,7 @@
           <a:bodyPr wrap="square" rtlCol="0" anchor="t"/>
           <a:lstStyle/>
           <a:p>
-            <a:pPr indent="0" marL="0">
+            <a:pPr marL="0" indent="0">
               <a:buNone/>
             </a:pPr>
             <a:r>
@@ -5922,7 +5424,7 @@
           <a:bodyPr wrap="square" rtlCol="0" anchor="t"/>
           <a:lstStyle/>
           <a:p>
-            <a:pPr indent="0" marL="0">
+            <a:pPr marL="0" indent="0">
               <a:buNone/>
             </a:pPr>
             <a:r>
@@ -5981,7 +5483,7 @@
           <a:bodyPr wrap="square" rtlCol="0" anchor="t"/>
           <a:lstStyle/>
           <a:p>
-            <a:pPr indent="0" marL="0">
+            <a:pPr marL="0" indent="0">
               <a:buNone/>
             </a:pPr>
             <a:r>
@@ -6020,7 +5522,7 @@
           <a:bodyPr wrap="square" rtlCol="0" anchor="ctr"/>
           <a:lstStyle/>
           <a:p>
-            <a:pPr indent="0" marL="0">
+            <a:pPr marL="0" indent="0">
               <a:buNone/>
             </a:pPr>
             <a:r>
@@ -6101,7 +5603,7 @@
           <a:bodyPr wrap="square" rtlCol="0" anchor="ctr"/>
           <a:lstStyle/>
           <a:p>
-            <a:pPr indent="0" marL="0">
+            <a:pPr marL="0" indent="0">
               <a:buNone/>
             </a:pPr>
             <a:r>
@@ -6160,7 +5662,7 @@
           <a:bodyPr wrap="square" rtlCol="0" anchor="t"/>
           <a:lstStyle/>
           <a:p>
-            <a:pPr indent="0" marL="0">
+            <a:pPr marL="0" indent="0">
               <a:buNone/>
             </a:pPr>
             <a:r>
@@ -6219,7 +5721,7 @@
           <a:bodyPr wrap="square" rtlCol="0" anchor="t"/>
           <a:lstStyle/>
           <a:p>
-            <a:pPr indent="0" marL="0">
+            <a:pPr marL="0" indent="0">
               <a:buNone/>
             </a:pPr>
             <a:r>
@@ -6278,7 +5780,7 @@
           <a:bodyPr wrap="square" rtlCol="0" anchor="t"/>
           <a:lstStyle/>
           <a:p>
-            <a:pPr indent="0" marL="0">
+            <a:pPr marL="0" indent="0">
               <a:buNone/>
             </a:pPr>
             <a:r>
@@ -6337,7 +5839,7 @@
           <a:bodyPr wrap="square" rtlCol="0" anchor="t"/>
           <a:lstStyle/>
           <a:p>
-            <a:pPr indent="0" marL="0">
+            <a:pPr marL="0" indent="0">
               <a:buNone/>
             </a:pPr>
             <a:r>
@@ -6376,7 +5878,7 @@
           <a:bodyPr wrap="square" rtlCol="0" anchor="ctr"/>
           <a:lstStyle/>
           <a:p>
-            <a:pPr indent="0" marL="0">
+            <a:pPr marL="0" indent="0">
               <a:buNone/>
             </a:pPr>
             <a:r>
@@ -6415,7 +5917,7 @@
           <a:bodyPr wrap="square" rtlCol="0" anchor="ctr"/>
           <a:lstStyle/>
           <a:p>
-            <a:pPr algn="ctr" indent="0" marL="0">
+            <a:pPr marL="0" indent="0" algn="ctr">
               <a:buNone/>
             </a:pPr>
             <a:r>
@@ -6454,7 +5956,7 @@
           <a:bodyPr wrap="square" rtlCol="0" anchor="ctr"/>
           <a:lstStyle/>
           <a:p>
-            <a:pPr indent="0" marL="0">
+            <a:pPr marL="0" indent="0">
               <a:buNone/>
             </a:pPr>
             <a:r>
@@ -6493,7 +5995,7 @@
           <a:bodyPr wrap="square" rtlCol="0" anchor="ctr"/>
           <a:lstStyle/>
           <a:p>
-            <a:pPr algn="r" indent="0" marL="0">
+            <a:pPr marL="0" indent="0" algn="r">
               <a:buNone/>
             </a:pPr>
             <a:r>
@@ -6527,6 +6029,7 @@
         <a:solidFill>
           <a:srgbClr val="183774"/>
         </a:solidFill>
+        <a:effectLst/>
       </p:bgPr>
     </p:bg>
     <p:spTree>
@@ -6545,45 +6048,6 @@
       </p:grpSpPr>
       <p:sp>
         <p:nvSpPr>
-          <p:cNvPr id="2" name="Text 0"/>
-          <p:cNvSpPr/>
-          <p:nvPr/>
-        </p:nvSpPr>
-        <p:spPr>
-          <a:xfrm>
-            <a:off x="9509760" y="320040"/>
-            <a:ext cx="2377440" cy="365760"/>
-          </a:xfrm>
-          <a:prstGeom prst="rect">
-            <a:avLst/>
-          </a:prstGeom>
-          <a:noFill/>
-          <a:ln/>
-        </p:spPr>
-        <p:txBody>
-          <a:bodyPr wrap="square" rtlCol="0" anchor="ctr"/>
-          <a:lstStyle/>
-          <a:p>
-            <a:pPr algn="r" indent="0" marL="0">
-              <a:buNone/>
-            </a:pPr>
-            <a:r>
-              <a:rPr lang="en-US" sz="1400" b="1" spc="200" kern="0" dirty="0">
-                <a:solidFill>
-                  <a:srgbClr val="247DFF"/>
-                </a:solidFill>
-                <a:latin typeface="Arial" pitchFamily="34" charset="0"/>
-                <a:ea typeface="Arial" pitchFamily="34" charset="-122"/>
-                <a:cs typeface="Arial" pitchFamily="34" charset="-120"/>
-              </a:rPr>
-              <a:t>SYNAPTICS</a:t>
-            </a:r>
-            <a:endParaRPr lang="en-US" sz="1400" dirty="0"/>
-          </a:p>
-        </p:txBody>
-      </p:sp>
-      <p:sp>
-        <p:nvSpPr>
           <p:cNvPr id="3" name="Text 1"/>
           <p:cNvSpPr/>
           <p:nvPr/>
@@ -6603,11 +6067,11 @@
           <a:bodyPr wrap="square" rtlCol="0" anchor="ctr"/>
           <a:lstStyle/>
           <a:p>
-            <a:pPr indent="0" marL="0">
-              <a:buNone/>
-            </a:pPr>
-            <a:r>
-              <a:rPr lang="en-US" sz="1300" b="1" spc="100" kern="0" dirty="0">
+            <a:pPr marL="0" indent="0">
+              <a:buNone/>
+            </a:pPr>
+            <a:r>
+              <a:rPr lang="en-US" sz="1300" b="1" kern="0" spc="100" dirty="0">
                 <a:solidFill>
                   <a:srgbClr val="247DFF"/>
                 </a:solidFill>
@@ -6642,7 +6106,7 @@
           <a:bodyPr wrap="square" rtlCol="0" anchor="ctr"/>
           <a:lstStyle/>
           <a:p>
-            <a:pPr indent="0" marL="0">
+            <a:pPr marL="0" indent="0">
               <a:buNone/>
             </a:pPr>
             <a:r>
@@ -6703,7 +6167,7 @@
           <a:bodyPr wrap="square" rtlCol="0" anchor="ctr"/>
           <a:lstStyle/>
           <a:p>
-            <a:pPr indent="0" marL="0">
+            <a:pPr marL="0" indent="0">
               <a:buNone/>
             </a:pPr>
             <a:r>
@@ -6742,7 +6206,7 @@
           <a:bodyPr wrap="square" rtlCol="0" anchor="ctr"/>
           <a:lstStyle/>
           <a:p>
-            <a:pPr indent="0" marL="0">
+            <a:pPr marL="0" indent="0">
               <a:buNone/>
             </a:pPr>
             <a:r>
@@ -6803,7 +6267,7 @@
           <a:bodyPr wrap="square" rtlCol="0" anchor="ctr"/>
           <a:lstStyle/>
           <a:p>
-            <a:pPr indent="0" marL="0">
+            <a:pPr marL="0" indent="0">
               <a:buNone/>
             </a:pPr>
             <a:r>
@@ -6842,7 +6306,7 @@
           <a:bodyPr wrap="square" rtlCol="0" anchor="ctr"/>
           <a:lstStyle/>
           <a:p>
-            <a:pPr indent="0" marL="0">
+            <a:pPr marL="0" indent="0">
               <a:buNone/>
             </a:pPr>
             <a:r>
@@ -6903,7 +6367,7 @@
           <a:bodyPr wrap="square" rtlCol="0" anchor="ctr"/>
           <a:lstStyle/>
           <a:p>
-            <a:pPr indent="0" marL="0">
+            <a:pPr marL="0" indent="0">
               <a:buNone/>
             </a:pPr>
             <a:r>
@@ -6942,7 +6406,7 @@
           <a:bodyPr wrap="square" rtlCol="0" anchor="ctr"/>
           <a:lstStyle/>
           <a:p>
-            <a:pPr indent="0" marL="0">
+            <a:pPr marL="0" indent="0">
               <a:buNone/>
             </a:pPr>
             <a:r>
@@ -7003,7 +6467,7 @@
           <a:bodyPr wrap="square" rtlCol="0" anchor="ctr"/>
           <a:lstStyle/>
           <a:p>
-            <a:pPr indent="0" marL="0">
+            <a:pPr marL="0" indent="0">
               <a:buNone/>
             </a:pPr>
             <a:r>
@@ -7042,7 +6506,7 @@
           <a:bodyPr wrap="square" rtlCol="0" anchor="ctr"/>
           <a:lstStyle/>
           <a:p>
-            <a:pPr indent="0" marL="0">
+            <a:pPr marL="0" indent="0">
               <a:buNone/>
             </a:pPr>
             <a:r>
@@ -7103,7 +6567,7 @@
           <a:bodyPr wrap="square" rtlCol="0" anchor="ctr"/>
           <a:lstStyle/>
           <a:p>
-            <a:pPr indent="0" marL="0">
+            <a:pPr marL="0" indent="0">
               <a:buNone/>
             </a:pPr>
             <a:r>
@@ -7142,7 +6606,7 @@
           <a:bodyPr wrap="square" rtlCol="0" anchor="ctr"/>
           <a:lstStyle/>
           <a:p>
-            <a:pPr indent="0" marL="0">
+            <a:pPr marL="0" indent="0">
               <a:buNone/>
             </a:pPr>
             <a:r>
@@ -7203,7 +6667,7 @@
           <a:bodyPr wrap="square" rtlCol="0" anchor="ctr"/>
           <a:lstStyle/>
           <a:p>
-            <a:pPr indent="0" marL="0">
+            <a:pPr marL="0" indent="0">
               <a:buNone/>
             </a:pPr>
             <a:r>
@@ -7242,7 +6706,7 @@
           <a:bodyPr wrap="square" rtlCol="0" anchor="ctr"/>
           <a:lstStyle/>
           <a:p>
-            <a:pPr indent="0" marL="0">
+            <a:pPr marL="0" indent="0">
               <a:buNone/>
             </a:pPr>
             <a:r>
@@ -7281,7 +6745,7 @@
           <a:bodyPr wrap="square" rtlCol="0" anchor="ctr"/>
           <a:lstStyle/>
           <a:p>
-            <a:pPr indent="0" marL="0">
+            <a:pPr marL="0" indent="0">
               <a:buNone/>
             </a:pPr>
             <a:r>
@@ -7320,7 +6784,7 @@
           <a:bodyPr wrap="square" rtlCol="0" anchor="ctr"/>
           <a:lstStyle/>
           <a:p>
-            <a:pPr algn="r" indent="0" marL="0">
+            <a:pPr marL="0" indent="0" algn="r">
               <a:buNone/>
             </a:pPr>
             <a:r>
@@ -7354,6 +6818,7 @@
         <a:solidFill>
           <a:srgbClr val="183774"/>
         </a:solidFill>
+        <a:effectLst/>
       </p:bgPr>
     </p:bg>
     <p:spTree>
@@ -7372,45 +6837,6 @@
       </p:grpSpPr>
       <p:sp>
         <p:nvSpPr>
-          <p:cNvPr id="2" name="Text 0"/>
-          <p:cNvSpPr/>
-          <p:nvPr/>
-        </p:nvSpPr>
-        <p:spPr>
-          <a:xfrm>
-            <a:off x="9509760" y="320040"/>
-            <a:ext cx="2377440" cy="365760"/>
-          </a:xfrm>
-          <a:prstGeom prst="rect">
-            <a:avLst/>
-          </a:prstGeom>
-          <a:noFill/>
-          <a:ln/>
-        </p:spPr>
-        <p:txBody>
-          <a:bodyPr wrap="square" rtlCol="0" anchor="ctr"/>
-          <a:lstStyle/>
-          <a:p>
-            <a:pPr algn="r" indent="0" marL="0">
-              <a:buNone/>
-            </a:pPr>
-            <a:r>
-              <a:rPr lang="en-US" sz="1400" b="1" spc="200" kern="0" dirty="0">
-                <a:solidFill>
-                  <a:srgbClr val="247DFF"/>
-                </a:solidFill>
-                <a:latin typeface="Arial" pitchFamily="34" charset="0"/>
-                <a:ea typeface="Arial" pitchFamily="34" charset="-122"/>
-                <a:cs typeface="Arial" pitchFamily="34" charset="-120"/>
-              </a:rPr>
-              <a:t>SYNAPTICS</a:t>
-            </a:r>
-            <a:endParaRPr lang="en-US" sz="1400" dirty="0"/>
-          </a:p>
-        </p:txBody>
-      </p:sp>
-      <p:sp>
-        <p:nvSpPr>
           <p:cNvPr id="3" name="Text 1"/>
           <p:cNvSpPr/>
           <p:nvPr/>
@@ -7430,11 +6856,11 @@
           <a:bodyPr wrap="square" rtlCol="0" anchor="ctr"/>
           <a:lstStyle/>
           <a:p>
-            <a:pPr indent="0" marL="0">
-              <a:buNone/>
-            </a:pPr>
-            <a:r>
-              <a:rPr lang="en-US" sz="1300" b="1" spc="100" kern="0" dirty="0">
+            <a:pPr marL="0" indent="0">
+              <a:buNone/>
+            </a:pPr>
+            <a:r>
+              <a:rPr lang="en-US" sz="1300" b="1" kern="0" spc="100" dirty="0">
                 <a:solidFill>
                   <a:srgbClr val="247DFF"/>
                 </a:solidFill>
@@ -7469,7 +6895,7 @@
           <a:bodyPr wrap="square" rtlCol="0" anchor="ctr"/>
           <a:lstStyle/>
           <a:p>
-            <a:pPr indent="0" marL="0">
+            <a:pPr marL="0" indent="0">
               <a:buNone/>
             </a:pPr>
             <a:r>
@@ -7550,7 +6976,7 @@
           <a:bodyPr wrap="square" rtlCol="0" anchor="ctr"/>
           <a:lstStyle/>
           <a:p>
-            <a:pPr indent="0" marL="0">
+            <a:pPr marL="0" indent="0">
               <a:buNone/>
             </a:pPr>
             <a:r>
@@ -7589,7 +7015,7 @@
           <a:bodyPr wrap="square" rtlCol="0" anchor="ctr"/>
           <a:lstStyle/>
           <a:p>
-            <a:pPr indent="0" marL="0">
+            <a:pPr marL="0" indent="0">
               <a:buNone/>
             </a:pPr>
             <a:r>
@@ -7648,7 +7074,7 @@
           <a:bodyPr wrap="square" rtlCol="0" anchor="t"/>
           <a:lstStyle/>
           <a:p>
-            <a:pPr indent="0" marL="0">
+            <a:pPr marL="0" indent="0">
               <a:lnSpc>
                 <a:spcPct val="115000"/>
               </a:lnSpc>
@@ -7710,7 +7136,7 @@
           <a:bodyPr wrap="square" rtlCol="0" anchor="t"/>
           <a:lstStyle/>
           <a:p>
-            <a:pPr indent="0" marL="0">
+            <a:pPr marL="0" indent="0">
               <a:lnSpc>
                 <a:spcPct val="115000"/>
               </a:lnSpc>
@@ -7772,7 +7198,7 @@
           <a:bodyPr wrap="square" rtlCol="0" anchor="t"/>
           <a:lstStyle/>
           <a:p>
-            <a:pPr indent="0" marL="0">
+            <a:pPr marL="0" indent="0">
               <a:lnSpc>
                 <a:spcPct val="115000"/>
               </a:lnSpc>
@@ -7834,7 +7260,7 @@
           <a:bodyPr wrap="square" rtlCol="0" anchor="t"/>
           <a:lstStyle/>
           <a:p>
-            <a:pPr indent="0" marL="0">
+            <a:pPr marL="0" indent="0">
               <a:lnSpc>
                 <a:spcPct val="115000"/>
               </a:lnSpc>
@@ -7896,7 +7322,7 @@
           <a:bodyPr wrap="square" rtlCol="0" anchor="t"/>
           <a:lstStyle/>
           <a:p>
-            <a:pPr indent="0" marL="0">
+            <a:pPr marL="0" indent="0">
               <a:lnSpc>
                 <a:spcPct val="115000"/>
               </a:lnSpc>
@@ -7980,7 +7406,7 @@
           <a:bodyPr wrap="square" rtlCol="0" anchor="ctr"/>
           <a:lstStyle/>
           <a:p>
-            <a:pPr indent="0" marL="0">
+            <a:pPr marL="0" indent="0">
               <a:buNone/>
             </a:pPr>
             <a:r>
@@ -8019,7 +7445,7 @@
           <a:bodyPr wrap="square" rtlCol="0" anchor="ctr"/>
           <a:lstStyle/>
           <a:p>
-            <a:pPr indent="0" marL="0">
+            <a:pPr marL="0" indent="0">
               <a:buNone/>
             </a:pPr>
             <a:r>
@@ -8078,7 +7504,7 @@
           <a:bodyPr wrap="square" rtlCol="0" anchor="t"/>
           <a:lstStyle/>
           <a:p>
-            <a:pPr indent="0" marL="0">
+            <a:pPr marL="0" indent="0">
               <a:lnSpc>
                 <a:spcPct val="115000"/>
               </a:lnSpc>
@@ -8140,7 +7566,7 @@
           <a:bodyPr wrap="square" rtlCol="0" anchor="t"/>
           <a:lstStyle/>
           <a:p>
-            <a:pPr indent="0" marL="0">
+            <a:pPr marL="0" indent="0">
               <a:lnSpc>
                 <a:spcPct val="115000"/>
               </a:lnSpc>
@@ -8202,7 +7628,7 @@
           <a:bodyPr wrap="square" rtlCol="0" anchor="t"/>
           <a:lstStyle/>
           <a:p>
-            <a:pPr indent="0" marL="0">
+            <a:pPr marL="0" indent="0">
               <a:lnSpc>
                 <a:spcPct val="115000"/>
               </a:lnSpc>
@@ -8264,7 +7690,7 @@
           <a:bodyPr wrap="square" rtlCol="0" anchor="t"/>
           <a:lstStyle/>
           <a:p>
-            <a:pPr indent="0" marL="0">
+            <a:pPr marL="0" indent="0">
               <a:lnSpc>
                 <a:spcPct val="115000"/>
               </a:lnSpc>
@@ -8326,7 +7752,7 @@
           <a:bodyPr wrap="square" rtlCol="0" anchor="t"/>
           <a:lstStyle/>
           <a:p>
-            <a:pPr indent="0" marL="0">
+            <a:pPr marL="0" indent="0">
               <a:lnSpc>
                 <a:spcPct val="115000"/>
               </a:lnSpc>
@@ -8368,7 +7794,7 @@
           <a:bodyPr wrap="square" rtlCol="0" anchor="ctr"/>
           <a:lstStyle/>
           <a:p>
-            <a:pPr indent="0" marL="0">
+            <a:pPr marL="0" indent="0">
               <a:buNone/>
             </a:pPr>
             <a:r>
@@ -8407,7 +7833,7 @@
           <a:bodyPr wrap="square" rtlCol="0" anchor="ctr"/>
           <a:lstStyle/>
           <a:p>
-            <a:pPr algn="r" indent="0" marL="0">
+            <a:pPr marL="0" indent="0" algn="r">
               <a:buNone/>
             </a:pPr>
             <a:r>
@@ -8441,6 +7867,7 @@
         <a:solidFill>
           <a:srgbClr val="183774"/>
         </a:solidFill>
+        <a:effectLst/>
       </p:bgPr>
     </p:bg>
     <p:spTree>
@@ -8459,45 +7886,6 @@
       </p:grpSpPr>
       <p:sp>
         <p:nvSpPr>
-          <p:cNvPr id="2" name="Text 0"/>
-          <p:cNvSpPr/>
-          <p:nvPr/>
-        </p:nvSpPr>
-        <p:spPr>
-          <a:xfrm>
-            <a:off x="9509760" y="320040"/>
-            <a:ext cx="2377440" cy="365760"/>
-          </a:xfrm>
-          <a:prstGeom prst="rect">
-            <a:avLst/>
-          </a:prstGeom>
-          <a:noFill/>
-          <a:ln/>
-        </p:spPr>
-        <p:txBody>
-          <a:bodyPr wrap="square" rtlCol="0" anchor="ctr"/>
-          <a:lstStyle/>
-          <a:p>
-            <a:pPr algn="r" indent="0" marL="0">
-              <a:buNone/>
-            </a:pPr>
-            <a:r>
-              <a:rPr lang="en-US" sz="1400" b="1" spc="200" kern="0" dirty="0">
-                <a:solidFill>
-                  <a:srgbClr val="247DFF"/>
-                </a:solidFill>
-                <a:latin typeface="Arial" pitchFamily="34" charset="0"/>
-                <a:ea typeface="Arial" pitchFamily="34" charset="-122"/>
-                <a:cs typeface="Arial" pitchFamily="34" charset="-120"/>
-              </a:rPr>
-              <a:t>SYNAPTICS</a:t>
-            </a:r>
-            <a:endParaRPr lang="en-US" sz="1400" dirty="0"/>
-          </a:p>
-        </p:txBody>
-      </p:sp>
-      <p:sp>
-        <p:nvSpPr>
           <p:cNvPr id="3" name="Text 1"/>
           <p:cNvSpPr/>
           <p:nvPr/>
@@ -8517,11 +7905,11 @@
           <a:bodyPr wrap="square" rtlCol="0" anchor="ctr"/>
           <a:lstStyle/>
           <a:p>
-            <a:pPr indent="0" marL="0">
-              <a:buNone/>
-            </a:pPr>
-            <a:r>
-              <a:rPr lang="en-US" sz="1300" b="1" spc="100" kern="0" dirty="0">
+            <a:pPr marL="0" indent="0">
+              <a:buNone/>
+            </a:pPr>
+            <a:r>
+              <a:rPr lang="en-US" sz="1300" b="1" kern="0" spc="100" dirty="0">
                 <a:solidFill>
                   <a:srgbClr val="247DFF"/>
                 </a:solidFill>
@@ -8556,7 +7944,7 @@
           <a:bodyPr wrap="square" rtlCol="0" anchor="ctr"/>
           <a:lstStyle/>
           <a:p>
-            <a:pPr indent="0" marL="0">
+            <a:pPr marL="0" indent="0">
               <a:buNone/>
             </a:pPr>
             <a:r>
@@ -8617,7 +8005,7 @@
           <a:bodyPr wrap="square" rtlCol="0" anchor="ctr"/>
           <a:lstStyle/>
           <a:p>
-            <a:pPr algn="l" indent="0" marL="0">
+            <a:pPr marL="0" indent="0" algn="l">
               <a:buNone/>
             </a:pPr>
             <a:r>
@@ -8656,7 +8044,7 @@
           <a:bodyPr wrap="square" rtlCol="0" anchor="ctr"/>
           <a:lstStyle/>
           <a:p>
-            <a:pPr algn="ctr" indent="0" marL="0">
+            <a:pPr marL="0" indent="0" algn="ctr">
               <a:buNone/>
             </a:pPr>
             <a:r>
@@ -8695,7 +8083,7 @@
           <a:bodyPr wrap="square" rtlCol="0" anchor="ctr"/>
           <a:lstStyle/>
           <a:p>
-            <a:pPr algn="ctr" indent="0" marL="0">
+            <a:pPr marL="0" indent="0" algn="ctr">
               <a:buNone/>
             </a:pPr>
             <a:r>
@@ -8754,7 +8142,7 @@
           <a:bodyPr wrap="square" rtlCol="0" anchor="ctr"/>
           <a:lstStyle/>
           <a:p>
-            <a:pPr indent="0" marL="0">
+            <a:pPr marL="0" indent="0">
               <a:buNone/>
             </a:pPr>
             <a:r>
@@ -8793,7 +8181,7 @@
           <a:bodyPr wrap="square" rtlCol="0" anchor="ctr"/>
           <a:lstStyle/>
           <a:p>
-            <a:pPr algn="ctr" indent="0" marL="0">
+            <a:pPr marL="0" indent="0" algn="ctr">
               <a:buNone/>
             </a:pPr>
             <a:r>
@@ -8832,7 +8220,7 @@
           <a:bodyPr wrap="square" rtlCol="0" anchor="ctr"/>
           <a:lstStyle/>
           <a:p>
-            <a:pPr algn="ctr" indent="0" marL="0">
+            <a:pPr marL="0" indent="0" algn="ctr">
               <a:buNone/>
             </a:pPr>
             <a:r>
@@ -8871,7 +8259,7 @@
           <a:bodyPr wrap="square" rtlCol="0" anchor="ctr"/>
           <a:lstStyle/>
           <a:p>
-            <a:pPr indent="0" marL="0">
+            <a:pPr marL="0" indent="0">
               <a:buNone/>
             </a:pPr>
             <a:r>
@@ -8910,7 +8298,7 @@
           <a:bodyPr wrap="square" rtlCol="0" anchor="ctr"/>
           <a:lstStyle/>
           <a:p>
-            <a:pPr algn="ctr" indent="0" marL="0">
+            <a:pPr marL="0" indent="0" algn="ctr">
               <a:buNone/>
             </a:pPr>
             <a:r>
@@ -8949,7 +8337,7 @@
           <a:bodyPr wrap="square" rtlCol="0" anchor="ctr"/>
           <a:lstStyle/>
           <a:p>
-            <a:pPr algn="ctr" indent="0" marL="0">
+            <a:pPr marL="0" indent="0" algn="ctr">
               <a:buNone/>
             </a:pPr>
             <a:r>
@@ -9008,7 +8396,7 @@
           <a:bodyPr wrap="square" rtlCol="0" anchor="ctr"/>
           <a:lstStyle/>
           <a:p>
-            <a:pPr indent="0" marL="0">
+            <a:pPr marL="0" indent="0">
               <a:buNone/>
             </a:pPr>
             <a:r>
@@ -9047,7 +8435,7 @@
           <a:bodyPr wrap="square" rtlCol="0" anchor="ctr"/>
           <a:lstStyle/>
           <a:p>
-            <a:pPr algn="ctr" indent="0" marL="0">
+            <a:pPr marL="0" indent="0" algn="ctr">
               <a:buNone/>
             </a:pPr>
             <a:r>
@@ -9086,7 +8474,7 @@
           <a:bodyPr wrap="square" rtlCol="0" anchor="ctr"/>
           <a:lstStyle/>
           <a:p>
-            <a:pPr algn="ctr" indent="0" marL="0">
+            <a:pPr marL="0" indent="0" algn="ctr">
               <a:buNone/>
             </a:pPr>
             <a:r>
@@ -9125,7 +8513,7 @@
           <a:bodyPr wrap="square" rtlCol="0" anchor="ctr"/>
           <a:lstStyle/>
           <a:p>
-            <a:pPr indent="0" marL="0">
+            <a:pPr marL="0" indent="0">
               <a:buNone/>
             </a:pPr>
             <a:r>
@@ -9164,7 +8552,7 @@
           <a:bodyPr wrap="square" rtlCol="0" anchor="ctr"/>
           <a:lstStyle/>
           <a:p>
-            <a:pPr algn="ctr" indent="0" marL="0">
+            <a:pPr marL="0" indent="0" algn="ctr">
               <a:buNone/>
             </a:pPr>
             <a:r>
@@ -9203,7 +8591,7 @@
           <a:bodyPr wrap="square" rtlCol="0" anchor="ctr"/>
           <a:lstStyle/>
           <a:p>
-            <a:pPr algn="ctr" indent="0" marL="0">
+            <a:pPr marL="0" indent="0" algn="ctr">
               <a:buNone/>
             </a:pPr>
             <a:r>
@@ -9262,7 +8650,7 @@
           <a:bodyPr wrap="square" rtlCol="0" anchor="ctr"/>
           <a:lstStyle/>
           <a:p>
-            <a:pPr indent="0" marL="0">
+            <a:pPr marL="0" indent="0">
               <a:buNone/>
             </a:pPr>
             <a:r>
@@ -9301,7 +8689,7 @@
           <a:bodyPr wrap="square" rtlCol="0" anchor="ctr"/>
           <a:lstStyle/>
           <a:p>
-            <a:pPr algn="ctr" indent="0" marL="0">
+            <a:pPr marL="0" indent="0" algn="ctr">
               <a:buNone/>
             </a:pPr>
             <a:r>
@@ -9340,7 +8728,7 @@
           <a:bodyPr wrap="square" rtlCol="0" anchor="ctr"/>
           <a:lstStyle/>
           <a:p>
-            <a:pPr algn="ctr" indent="0" marL="0">
+            <a:pPr marL="0" indent="0" algn="ctr">
               <a:buNone/>
             </a:pPr>
             <a:r>
@@ -9379,7 +8767,7 @@
           <a:bodyPr wrap="square" rtlCol="0" anchor="ctr"/>
           <a:lstStyle/>
           <a:p>
-            <a:pPr indent="0" marL="0">
+            <a:pPr marL="0" indent="0">
               <a:buNone/>
             </a:pPr>
             <a:r>
@@ -9418,7 +8806,7 @@
           <a:bodyPr wrap="square" rtlCol="0" anchor="ctr"/>
           <a:lstStyle/>
           <a:p>
-            <a:pPr algn="ctr" indent="0" marL="0">
+            <a:pPr marL="0" indent="0" algn="ctr">
               <a:buNone/>
             </a:pPr>
             <a:r>
@@ -9457,7 +8845,7 @@
           <a:bodyPr wrap="square" rtlCol="0" anchor="ctr"/>
           <a:lstStyle/>
           <a:p>
-            <a:pPr algn="ctr" indent="0" marL="0">
+            <a:pPr marL="0" indent="0" algn="ctr">
               <a:buNone/>
             </a:pPr>
             <a:r>
@@ -9516,7 +8904,7 @@
           <a:bodyPr wrap="square" rtlCol="0" anchor="ctr"/>
           <a:lstStyle/>
           <a:p>
-            <a:pPr indent="0" marL="0">
+            <a:pPr marL="0" indent="0">
               <a:buNone/>
             </a:pPr>
             <a:r>
@@ -9555,7 +8943,7 @@
           <a:bodyPr wrap="square" rtlCol="0" anchor="ctr"/>
           <a:lstStyle/>
           <a:p>
-            <a:pPr algn="ctr" indent="0" marL="0">
+            <a:pPr marL="0" indent="0" algn="ctr">
               <a:buNone/>
             </a:pPr>
             <a:r>
@@ -9594,7 +8982,7 @@
           <a:bodyPr wrap="square" rtlCol="0" anchor="ctr"/>
           <a:lstStyle/>
           <a:p>
-            <a:pPr algn="ctr" indent="0" marL="0">
+            <a:pPr marL="0" indent="0" algn="ctr">
               <a:buNone/>
             </a:pPr>
             <a:r>
@@ -9633,7 +9021,7 @@
           <a:bodyPr wrap="square" rtlCol="0" anchor="ctr"/>
           <a:lstStyle/>
           <a:p>
-            <a:pPr indent="0" marL="0">
+            <a:pPr marL="0" indent="0">
               <a:buNone/>
             </a:pPr>
             <a:r>
@@ -9672,7 +9060,7 @@
           <a:bodyPr wrap="square" rtlCol="0" anchor="ctr"/>
           <a:lstStyle/>
           <a:p>
-            <a:pPr indent="0" marL="0">
+            <a:pPr marL="0" indent="0">
               <a:buNone/>
             </a:pPr>
             <a:r>
@@ -9711,7 +9099,7 @@
           <a:bodyPr wrap="square" rtlCol="0" anchor="ctr"/>
           <a:lstStyle/>
           <a:p>
-            <a:pPr algn="r" indent="0" marL="0">
+            <a:pPr marL="0" indent="0" algn="r">
               <a:buNone/>
             </a:pPr>
             <a:r>
@@ -9745,6 +9133,7 @@
         <a:solidFill>
           <a:srgbClr val="183774"/>
         </a:solidFill>
+        <a:effectLst/>
       </p:bgPr>
     </p:bg>
     <p:spTree>
@@ -9763,45 +9152,6 @@
       </p:grpSpPr>
       <p:sp>
         <p:nvSpPr>
-          <p:cNvPr id="2" name="Text 0"/>
-          <p:cNvSpPr/>
-          <p:nvPr/>
-        </p:nvSpPr>
-        <p:spPr>
-          <a:xfrm>
-            <a:off x="9509760" y="320040"/>
-            <a:ext cx="2377440" cy="365760"/>
-          </a:xfrm>
-          <a:prstGeom prst="rect">
-            <a:avLst/>
-          </a:prstGeom>
-          <a:noFill/>
-          <a:ln/>
-        </p:spPr>
-        <p:txBody>
-          <a:bodyPr wrap="square" rtlCol="0" anchor="ctr"/>
-          <a:lstStyle/>
-          <a:p>
-            <a:pPr algn="r" indent="0" marL="0">
-              <a:buNone/>
-            </a:pPr>
-            <a:r>
-              <a:rPr lang="en-US" sz="1400" b="1" spc="200" kern="0" dirty="0">
-                <a:solidFill>
-                  <a:srgbClr val="247DFF"/>
-                </a:solidFill>
-                <a:latin typeface="Arial" pitchFamily="34" charset="0"/>
-                <a:ea typeface="Arial" pitchFamily="34" charset="-122"/>
-                <a:cs typeface="Arial" pitchFamily="34" charset="-120"/>
-              </a:rPr>
-              <a:t>SYNAPTICS</a:t>
-            </a:r>
-            <a:endParaRPr lang="en-US" sz="1400" dirty="0"/>
-          </a:p>
-        </p:txBody>
-      </p:sp>
-      <p:sp>
-        <p:nvSpPr>
           <p:cNvPr id="3" name="Text 1"/>
           <p:cNvSpPr/>
           <p:nvPr/>
@@ -9821,11 +9171,11 @@
           <a:bodyPr wrap="square" rtlCol="0" anchor="ctr"/>
           <a:lstStyle/>
           <a:p>
-            <a:pPr indent="0" marL="0">
-              <a:buNone/>
-            </a:pPr>
-            <a:r>
-              <a:rPr lang="en-US" sz="1300" b="1" spc="100" kern="0" dirty="0">
+            <a:pPr marL="0" indent="0">
+              <a:buNone/>
+            </a:pPr>
+            <a:r>
+              <a:rPr lang="en-US" sz="1300" b="1" kern="0" spc="100" dirty="0">
                 <a:solidFill>
                   <a:srgbClr val="247DFF"/>
                 </a:solidFill>
@@ -9860,7 +9210,7 @@
           <a:bodyPr wrap="square" rtlCol="0" anchor="ctr"/>
           <a:lstStyle/>
           <a:p>
-            <a:pPr indent="0" marL="0">
+            <a:pPr marL="0" indent="0">
               <a:buNone/>
             </a:pPr>
             <a:r>
@@ -9899,7 +9249,7 @@
           <a:bodyPr wrap="square" rtlCol="0" anchor="ctr"/>
           <a:lstStyle/>
           <a:p>
-            <a:pPr indent="0" marL="0">
+            <a:pPr marL="0" indent="0">
               <a:lnSpc>
                 <a:spcPct val="130000"/>
               </a:lnSpc>
@@ -9963,7 +9313,7 @@
           <a:bodyPr wrap="square" rtlCol="0" anchor="ctr"/>
           <a:lstStyle/>
           <a:p>
-            <a:pPr indent="0" marL="0">
+            <a:pPr marL="0" indent="0">
               <a:buNone/>
             </a:pPr>
             <a:r>
@@ -10002,7 +9352,7 @@
           <a:bodyPr wrap="square" rtlCol="0" anchor="ctr"/>
           <a:lstStyle/>
           <a:p>
-            <a:pPr indent="0" marL="0">
+            <a:pPr marL="0" indent="0">
               <a:buNone/>
             </a:pPr>
             <a:r>
@@ -10061,7 +9411,7 @@
           <a:bodyPr wrap="square" rtlCol="0" anchor="t"/>
           <a:lstStyle/>
           <a:p>
-            <a:pPr indent="0" marL="0">
+            <a:pPr marL="0" indent="0">
               <a:lnSpc>
                 <a:spcPct val="115000"/>
               </a:lnSpc>
@@ -10123,7 +9473,7 @@
           <a:bodyPr wrap="square" rtlCol="0" anchor="t"/>
           <a:lstStyle/>
           <a:p>
-            <a:pPr indent="0" marL="0">
+            <a:pPr marL="0" indent="0">
               <a:lnSpc>
                 <a:spcPct val="115000"/>
               </a:lnSpc>
@@ -10185,7 +9535,7 @@
           <a:bodyPr wrap="square" rtlCol="0" anchor="t"/>
           <a:lstStyle/>
           <a:p>
-            <a:pPr indent="0" marL="0">
+            <a:pPr marL="0" indent="0">
               <a:lnSpc>
                 <a:spcPct val="115000"/>
               </a:lnSpc>
@@ -10249,7 +9599,7 @@
           <a:bodyPr wrap="square" rtlCol="0" anchor="ctr"/>
           <a:lstStyle/>
           <a:p>
-            <a:pPr indent="0" marL="0">
+            <a:pPr marL="0" indent="0">
               <a:buNone/>
             </a:pPr>
             <a:r>
@@ -10288,7 +9638,7 @@
           <a:bodyPr wrap="square" rtlCol="0" anchor="ctr"/>
           <a:lstStyle/>
           <a:p>
-            <a:pPr indent="0" marL="0">
+            <a:pPr marL="0" indent="0">
               <a:buNone/>
             </a:pPr>
             <a:r>
@@ -10347,7 +9697,7 @@
           <a:bodyPr wrap="square" rtlCol="0" anchor="t"/>
           <a:lstStyle/>
           <a:p>
-            <a:pPr indent="0" marL="0">
+            <a:pPr marL="0" indent="0">
               <a:lnSpc>
                 <a:spcPct val="115000"/>
               </a:lnSpc>
@@ -10409,7 +9759,7 @@
           <a:bodyPr wrap="square" rtlCol="0" anchor="t"/>
           <a:lstStyle/>
           <a:p>
-            <a:pPr indent="0" marL="0">
+            <a:pPr marL="0" indent="0">
               <a:lnSpc>
                 <a:spcPct val="115000"/>
               </a:lnSpc>
@@ -10471,7 +9821,7 @@
           <a:bodyPr wrap="square" rtlCol="0" anchor="t"/>
           <a:lstStyle/>
           <a:p>
-            <a:pPr indent="0" marL="0">
+            <a:pPr marL="0" indent="0">
               <a:lnSpc>
                 <a:spcPct val="115000"/>
               </a:lnSpc>
@@ -10513,7 +9863,7 @@
           <a:bodyPr wrap="square" rtlCol="0" anchor="ctr"/>
           <a:lstStyle/>
           <a:p>
-            <a:pPr indent="0" marL="0">
+            <a:pPr marL="0" indent="0">
               <a:buNone/>
             </a:pPr>
             <a:r>
@@ -10552,7 +9902,7 @@
           <a:bodyPr wrap="square" rtlCol="0" anchor="ctr"/>
           <a:lstStyle/>
           <a:p>
-            <a:pPr indent="0" marL="0">
+            <a:pPr marL="0" indent="0">
               <a:buNone/>
             </a:pPr>
             <a:r>
@@ -10591,7 +9941,7 @@
           <a:bodyPr wrap="square" rtlCol="0" anchor="ctr"/>
           <a:lstStyle/>
           <a:p>
-            <a:pPr algn="r" indent="0" marL="0">
+            <a:pPr marL="0" indent="0" algn="r">
               <a:buNone/>
             </a:pPr>
             <a:r>
@@ -10625,6 +9975,7 @@
         <a:solidFill>
           <a:srgbClr val="183774"/>
         </a:solidFill>
+        <a:effectLst/>
       </p:bgPr>
     </p:bg>
     <p:spTree>
@@ -10643,45 +9994,6 @@
       </p:grpSpPr>
       <p:sp>
         <p:nvSpPr>
-          <p:cNvPr id="2" name="Text 0"/>
-          <p:cNvSpPr/>
-          <p:nvPr/>
-        </p:nvSpPr>
-        <p:spPr>
-          <a:xfrm>
-            <a:off x="9509760" y="320040"/>
-            <a:ext cx="2377440" cy="365760"/>
-          </a:xfrm>
-          <a:prstGeom prst="rect">
-            <a:avLst/>
-          </a:prstGeom>
-          <a:noFill/>
-          <a:ln/>
-        </p:spPr>
-        <p:txBody>
-          <a:bodyPr wrap="square" rtlCol="0" anchor="ctr"/>
-          <a:lstStyle/>
-          <a:p>
-            <a:pPr algn="r" indent="0" marL="0">
-              <a:buNone/>
-            </a:pPr>
-            <a:r>
-              <a:rPr lang="en-US" sz="1400" b="1" spc="200" kern="0" dirty="0">
-                <a:solidFill>
-                  <a:srgbClr val="247DFF"/>
-                </a:solidFill>
-                <a:latin typeface="Arial" pitchFamily="34" charset="0"/>
-                <a:ea typeface="Arial" pitchFamily="34" charset="-122"/>
-                <a:cs typeface="Arial" pitchFamily="34" charset="-120"/>
-              </a:rPr>
-              <a:t>SYNAPTICS</a:t>
-            </a:r>
-            <a:endParaRPr lang="en-US" sz="1400" dirty="0"/>
-          </a:p>
-        </p:txBody>
-      </p:sp>
-      <p:sp>
-        <p:nvSpPr>
           <p:cNvPr id="3" name="Text 1"/>
           <p:cNvSpPr/>
           <p:nvPr/>
@@ -10701,11 +10013,11 @@
           <a:bodyPr wrap="square" rtlCol="0" anchor="ctr"/>
           <a:lstStyle/>
           <a:p>
-            <a:pPr indent="0" marL="0">
-              <a:buNone/>
-            </a:pPr>
-            <a:r>
-              <a:rPr lang="en-US" sz="1300" b="1" spc="100" kern="0" dirty="0">
+            <a:pPr marL="0" indent="0">
+              <a:buNone/>
+            </a:pPr>
+            <a:r>
+              <a:rPr lang="en-US" sz="1300" b="1" kern="0" spc="100" dirty="0" err="1" smtClean="0">
                 <a:solidFill>
                   <a:srgbClr val="247DFF"/>
                 </a:solidFill>
@@ -10713,7 +10025,7 @@
                 <a:ea typeface="Arial" pitchFamily="34" charset="-122"/>
                 <a:cs typeface="Arial" pitchFamily="34" charset="-120"/>
               </a:rPr>
-              <a:t>FREERTOS</a:t>
+              <a:t>FreeRTOS</a:t>
             </a:r>
             <a:endParaRPr lang="en-US" sz="1300" dirty="0"/>
           </a:p>
@@ -10740,7 +10052,7 @@
           <a:bodyPr wrap="square" rtlCol="0" anchor="ctr"/>
           <a:lstStyle/>
           <a:p>
-            <a:pPr indent="0" marL="0">
+            <a:pPr marL="0" indent="0">
               <a:buNone/>
             </a:pPr>
             <a:r>
@@ -10801,7 +10113,7 @@
           <a:bodyPr wrap="square" rtlCol="0" anchor="ctr"/>
           <a:lstStyle/>
           <a:p>
-            <a:pPr indent="0" marL="0">
+            <a:pPr marL="0" indent="0">
               <a:buNone/>
             </a:pPr>
             <a:r>
@@ -10840,7 +10152,7 @@
           <a:bodyPr wrap="square" rtlCol="0" anchor="ctr"/>
           <a:lstStyle/>
           <a:p>
-            <a:pPr indent="0" marL="0">
+            <a:pPr marL="0" indent="0">
               <a:buNone/>
             </a:pPr>
             <a:r>
@@ -10901,7 +10213,7 @@
           <a:bodyPr wrap="square" rtlCol="0" anchor="ctr"/>
           <a:lstStyle/>
           <a:p>
-            <a:pPr indent="0" marL="0">
+            <a:pPr marL="0" indent="0">
               <a:buNone/>
             </a:pPr>
             <a:r>
@@ -10940,7 +10252,7 @@
           <a:bodyPr wrap="square" rtlCol="0" anchor="ctr"/>
           <a:lstStyle/>
           <a:p>
-            <a:pPr indent="0" marL="0">
+            <a:pPr marL="0" indent="0">
               <a:buNone/>
             </a:pPr>
             <a:r>
@@ -11001,7 +10313,7 @@
           <a:bodyPr wrap="square" rtlCol="0" anchor="ctr"/>
           <a:lstStyle/>
           <a:p>
-            <a:pPr indent="0" marL="0">
+            <a:pPr marL="0" indent="0">
               <a:buNone/>
             </a:pPr>
             <a:r>
@@ -11040,7 +10352,7 @@
           <a:bodyPr wrap="square" rtlCol="0" anchor="ctr"/>
           <a:lstStyle/>
           <a:p>
-            <a:pPr indent="0" marL="0">
+            <a:pPr marL="0" indent="0">
               <a:buNone/>
             </a:pPr>
             <a:r>
@@ -11101,7 +10413,7 @@
           <a:bodyPr wrap="square" rtlCol="0" anchor="ctr"/>
           <a:lstStyle/>
           <a:p>
-            <a:pPr indent="0" marL="0">
+            <a:pPr marL="0" indent="0">
               <a:buNone/>
             </a:pPr>
             <a:r>
@@ -11140,7 +10452,7 @@
           <a:bodyPr wrap="square" rtlCol="0" anchor="ctr"/>
           <a:lstStyle/>
           <a:p>
-            <a:pPr indent="0" marL="0">
+            <a:pPr marL="0" indent="0">
               <a:buNone/>
             </a:pPr>
             <a:r>
@@ -11201,7 +10513,7 @@
           <a:bodyPr wrap="square" rtlCol="0" anchor="ctr"/>
           <a:lstStyle/>
           <a:p>
-            <a:pPr indent="0" marL="0">
+            <a:pPr marL="0" indent="0">
               <a:buNone/>
             </a:pPr>
             <a:r>
@@ -11240,7 +10552,7 @@
           <a:bodyPr wrap="square" rtlCol="0" anchor="ctr"/>
           <a:lstStyle/>
           <a:p>
-            <a:pPr indent="0" marL="0">
+            <a:pPr marL="0" indent="0">
               <a:buNone/>
             </a:pPr>
             <a:r>
@@ -11301,7 +10613,7 @@
           <a:bodyPr wrap="square" rtlCol="0" anchor="ctr"/>
           <a:lstStyle/>
           <a:p>
-            <a:pPr indent="0" marL="0">
+            <a:pPr marL="0" indent="0">
               <a:buNone/>
             </a:pPr>
             <a:r>
@@ -11340,7 +10652,7 @@
           <a:bodyPr wrap="square" rtlCol="0" anchor="ctr"/>
           <a:lstStyle/>
           <a:p>
-            <a:pPr indent="0" marL="0">
+            <a:pPr marL="0" indent="0">
               <a:buNone/>
             </a:pPr>
             <a:r>
@@ -11379,7 +10691,7 @@
           <a:bodyPr wrap="square" rtlCol="0" anchor="ctr"/>
           <a:lstStyle/>
           <a:p>
-            <a:pPr indent="0" marL="0">
+            <a:pPr marL="0" indent="0">
               <a:buNone/>
             </a:pPr>
             <a:r>
@@ -11418,7 +10730,7 @@
           <a:bodyPr wrap="square" rtlCol="0" anchor="ctr"/>
           <a:lstStyle/>
           <a:p>
-            <a:pPr algn="r" indent="0" marL="0">
+            <a:pPr marL="0" indent="0" algn="r">
               <a:buNone/>
             </a:pPr>
             <a:r>
@@ -11452,6 +10764,7 @@
         <a:solidFill>
           <a:srgbClr val="183774"/>
         </a:solidFill>
+        <a:effectLst/>
       </p:bgPr>
     </p:bg>
     <p:spTree>
@@ -11470,45 +10783,6 @@
       </p:grpSpPr>
       <p:sp>
         <p:nvSpPr>
-          <p:cNvPr id="2" name="Text 0"/>
-          <p:cNvSpPr/>
-          <p:nvPr/>
-        </p:nvSpPr>
-        <p:spPr>
-          <a:xfrm>
-            <a:off x="9509760" y="320040"/>
-            <a:ext cx="2377440" cy="365760"/>
-          </a:xfrm>
-          <a:prstGeom prst="rect">
-            <a:avLst/>
-          </a:prstGeom>
-          <a:noFill/>
-          <a:ln/>
-        </p:spPr>
-        <p:txBody>
-          <a:bodyPr wrap="square" rtlCol="0" anchor="ctr"/>
-          <a:lstStyle/>
-          <a:p>
-            <a:pPr algn="r" indent="0" marL="0">
-              <a:buNone/>
-            </a:pPr>
-            <a:r>
-              <a:rPr lang="en-US" sz="1400" b="1" spc="200" kern="0" dirty="0">
-                <a:solidFill>
-                  <a:srgbClr val="247DFF"/>
-                </a:solidFill>
-                <a:latin typeface="Arial" pitchFamily="34" charset="0"/>
-                <a:ea typeface="Arial" pitchFamily="34" charset="-122"/>
-                <a:cs typeface="Arial" pitchFamily="34" charset="-120"/>
-              </a:rPr>
-              <a:t>SYNAPTICS</a:t>
-            </a:r>
-            <a:endParaRPr lang="en-US" sz="1400" dirty="0"/>
-          </a:p>
-        </p:txBody>
-      </p:sp>
-      <p:sp>
-        <p:nvSpPr>
           <p:cNvPr id="3" name="Text 1"/>
           <p:cNvSpPr/>
           <p:nvPr/>
@@ -11528,11 +10802,11 @@
           <a:bodyPr wrap="square" rtlCol="0" anchor="ctr"/>
           <a:lstStyle/>
           <a:p>
-            <a:pPr indent="0" marL="0">
-              <a:buNone/>
-            </a:pPr>
-            <a:r>
-              <a:rPr lang="en-US" sz="1300" b="1" spc="100" kern="0" dirty="0">
+            <a:pPr marL="0" indent="0">
+              <a:buNone/>
+            </a:pPr>
+            <a:r>
+              <a:rPr lang="en-US" sz="1300" b="1" kern="0" spc="100" dirty="0" err="1" smtClean="0">
                 <a:solidFill>
                   <a:srgbClr val="247DFF"/>
                 </a:solidFill>
@@ -11540,7 +10814,7 @@
                 <a:ea typeface="Arial" pitchFamily="34" charset="-122"/>
                 <a:cs typeface="Arial" pitchFamily="34" charset="-120"/>
               </a:rPr>
-              <a:t>FREERTOS</a:t>
+              <a:t>FreeRTOS</a:t>
             </a:r>
             <a:endParaRPr lang="en-US" sz="1300" dirty="0"/>
           </a:p>
@@ -11567,7 +10841,7 @@
           <a:bodyPr wrap="square" rtlCol="0" anchor="ctr"/>
           <a:lstStyle/>
           <a:p>
-            <a:pPr indent="0" marL="0">
+            <a:pPr marL="0" indent="0">
               <a:buNone/>
             </a:pPr>
             <a:r>
@@ -11628,7 +10902,7 @@
           <a:bodyPr wrap="square" rtlCol="0" anchor="ctr"/>
           <a:lstStyle/>
           <a:p>
-            <a:pPr indent="0" marL="0">
+            <a:pPr marL="0" indent="0">
               <a:buNone/>
             </a:pPr>
             <a:r>
@@ -11667,7 +10941,7 @@
           <a:bodyPr wrap="square" rtlCol="0" anchor="ctr"/>
           <a:lstStyle/>
           <a:p>
-            <a:pPr indent="0" marL="0">
+            <a:pPr marL="0" indent="0">
               <a:buNone/>
             </a:pPr>
             <a:r>
@@ -11728,7 +11002,7 @@
           <a:bodyPr wrap="square" rtlCol="0" anchor="ctr"/>
           <a:lstStyle/>
           <a:p>
-            <a:pPr indent="0" marL="0">
+            <a:pPr marL="0" indent="0">
               <a:buNone/>
             </a:pPr>
             <a:r>
@@ -11767,7 +11041,7 @@
           <a:bodyPr wrap="square" rtlCol="0" anchor="ctr"/>
           <a:lstStyle/>
           <a:p>
-            <a:pPr indent="0" marL="0">
+            <a:pPr marL="0" indent="0">
               <a:buNone/>
             </a:pPr>
             <a:r>
@@ -11828,7 +11102,7 @@
           <a:bodyPr wrap="square" rtlCol="0" anchor="ctr"/>
           <a:lstStyle/>
           <a:p>
-            <a:pPr indent="0" marL="0">
+            <a:pPr marL="0" indent="0">
               <a:buNone/>
             </a:pPr>
             <a:r>
@@ -11867,7 +11141,7 @@
           <a:bodyPr wrap="square" rtlCol="0" anchor="ctr"/>
           <a:lstStyle/>
           <a:p>
-            <a:pPr indent="0" marL="0">
+            <a:pPr marL="0" indent="0">
               <a:buNone/>
             </a:pPr>
             <a:r>
@@ -11928,7 +11202,7 @@
           <a:bodyPr wrap="square" rtlCol="0" anchor="ctr"/>
           <a:lstStyle/>
           <a:p>
-            <a:pPr indent="0" marL="0">
+            <a:pPr marL="0" indent="0">
               <a:buNone/>
             </a:pPr>
             <a:r>
@@ -11967,7 +11241,7 @@
           <a:bodyPr wrap="square" rtlCol="0" anchor="ctr"/>
           <a:lstStyle/>
           <a:p>
-            <a:pPr indent="0" marL="0">
+            <a:pPr marL="0" indent="0">
               <a:buNone/>
             </a:pPr>
             <a:r>
@@ -12028,7 +11302,7 @@
           <a:bodyPr wrap="square" rtlCol="0" anchor="ctr"/>
           <a:lstStyle/>
           <a:p>
-            <a:pPr indent="0" marL="0">
+            <a:pPr marL="0" indent="0">
               <a:buNone/>
             </a:pPr>
             <a:r>
@@ -12067,7 +11341,7 @@
           <a:bodyPr wrap="square" rtlCol="0" anchor="ctr"/>
           <a:lstStyle/>
           <a:p>
-            <a:pPr indent="0" marL="0">
+            <a:pPr marL="0" indent="0">
               <a:buNone/>
             </a:pPr>
             <a:r>
@@ -12128,7 +11402,7 @@
           <a:bodyPr wrap="square" rtlCol="0" anchor="ctr"/>
           <a:lstStyle/>
           <a:p>
-            <a:pPr indent="0" marL="0">
+            <a:pPr marL="0" indent="0">
               <a:buNone/>
             </a:pPr>
             <a:r>
@@ -12167,7 +11441,7 @@
           <a:bodyPr wrap="square" rtlCol="0" anchor="ctr"/>
           <a:lstStyle/>
           <a:p>
-            <a:pPr indent="0" marL="0">
+            <a:pPr marL="0" indent="0">
               <a:buNone/>
             </a:pPr>
             <a:r>
@@ -12206,7 +11480,7 @@
           <a:bodyPr wrap="square" rtlCol="0" anchor="ctr"/>
           <a:lstStyle/>
           <a:p>
-            <a:pPr indent="0" marL="0">
+            <a:pPr marL="0" indent="0">
               <a:buNone/>
             </a:pPr>
             <a:r>
@@ -12245,7 +11519,7 @@
           <a:bodyPr wrap="square" rtlCol="0" anchor="ctr"/>
           <a:lstStyle/>
           <a:p>
-            <a:pPr algn="r" indent="0" marL="0">
+            <a:pPr marL="0" indent="0" algn="r">
               <a:buNone/>
             </a:pPr>
             <a:r>
@@ -12279,6 +11553,7 @@
         <a:solidFill>
           <a:srgbClr val="183774"/>
         </a:solidFill>
+        <a:effectLst/>
       </p:bgPr>
     </p:bg>
     <p:spTree>
@@ -12297,45 +11572,6 @@
       </p:grpSpPr>
       <p:sp>
         <p:nvSpPr>
-          <p:cNvPr id="2" name="Text 0"/>
-          <p:cNvSpPr/>
-          <p:nvPr/>
-        </p:nvSpPr>
-        <p:spPr>
-          <a:xfrm>
-            <a:off x="9509760" y="320040"/>
-            <a:ext cx="2377440" cy="365760"/>
-          </a:xfrm>
-          <a:prstGeom prst="rect">
-            <a:avLst/>
-          </a:prstGeom>
-          <a:noFill/>
-          <a:ln/>
-        </p:spPr>
-        <p:txBody>
-          <a:bodyPr wrap="square" rtlCol="0" anchor="ctr"/>
-          <a:lstStyle/>
-          <a:p>
-            <a:pPr algn="r" indent="0" marL="0">
-              <a:buNone/>
-            </a:pPr>
-            <a:r>
-              <a:rPr lang="en-US" sz="1400" b="1" spc="200" kern="0" dirty="0">
-                <a:solidFill>
-                  <a:srgbClr val="247DFF"/>
-                </a:solidFill>
-                <a:latin typeface="Arial" pitchFamily="34" charset="0"/>
-                <a:ea typeface="Arial" pitchFamily="34" charset="-122"/>
-                <a:cs typeface="Arial" pitchFamily="34" charset="-120"/>
-              </a:rPr>
-              <a:t>SYNAPTICS</a:t>
-            </a:r>
-            <a:endParaRPr lang="en-US" sz="1400" dirty="0"/>
-          </a:p>
-        </p:txBody>
-      </p:sp>
-      <p:sp>
-        <p:nvSpPr>
           <p:cNvPr id="3" name="Text 1"/>
           <p:cNvSpPr/>
           <p:nvPr/>
@@ -12355,11 +11591,11 @@
           <a:bodyPr wrap="square" rtlCol="0" anchor="ctr"/>
           <a:lstStyle/>
           <a:p>
-            <a:pPr indent="0" marL="0">
-              <a:buNone/>
-            </a:pPr>
-            <a:r>
-              <a:rPr lang="en-US" sz="1300" b="1" spc="100" kern="0" dirty="0">
+            <a:pPr marL="0" indent="0">
+              <a:buNone/>
+            </a:pPr>
+            <a:r>
+              <a:rPr lang="en-US" sz="1300" b="1" kern="0" spc="100" dirty="0">
                 <a:solidFill>
                   <a:srgbClr val="247DFF"/>
                 </a:solidFill>
@@ -12394,7 +11630,7 @@
           <a:bodyPr wrap="square" rtlCol="0" anchor="ctr"/>
           <a:lstStyle/>
           <a:p>
-            <a:pPr indent="0" marL="0">
+            <a:pPr marL="0" indent="0">
               <a:buNone/>
             </a:pPr>
             <a:r>
@@ -12455,7 +11691,7 @@
           <a:bodyPr wrap="square" rtlCol="0" anchor="ctr"/>
           <a:lstStyle/>
           <a:p>
-            <a:pPr indent="0" marL="0">
+            <a:pPr marL="0" indent="0">
               <a:buNone/>
             </a:pPr>
             <a:r>
@@ -12494,7 +11730,7 @@
           <a:bodyPr wrap="square" rtlCol="0" anchor="ctr"/>
           <a:lstStyle/>
           <a:p>
-            <a:pPr indent="0" marL="0">
+            <a:pPr marL="0" indent="0">
               <a:buNone/>
             </a:pPr>
             <a:r>
@@ -12555,7 +11791,7 @@
           <a:bodyPr wrap="square" rtlCol="0" anchor="ctr"/>
           <a:lstStyle/>
           <a:p>
-            <a:pPr indent="0" marL="0">
+            <a:pPr marL="0" indent="0">
               <a:buNone/>
             </a:pPr>
             <a:r>
@@ -12594,7 +11830,7 @@
           <a:bodyPr wrap="square" rtlCol="0" anchor="ctr"/>
           <a:lstStyle/>
           <a:p>
-            <a:pPr indent="0" marL="0">
+            <a:pPr marL="0" indent="0">
               <a:buNone/>
             </a:pPr>
             <a:r>
@@ -12655,7 +11891,7 @@
           <a:bodyPr wrap="square" rtlCol="0" anchor="ctr"/>
           <a:lstStyle/>
           <a:p>
-            <a:pPr indent="0" marL="0">
+            <a:pPr marL="0" indent="0">
               <a:buNone/>
             </a:pPr>
             <a:r>
@@ -12694,7 +11930,7 @@
           <a:bodyPr wrap="square" rtlCol="0" anchor="ctr"/>
           <a:lstStyle/>
           <a:p>
-            <a:pPr indent="0" marL="0">
+            <a:pPr marL="0" indent="0">
               <a:buNone/>
             </a:pPr>
             <a:r>
@@ -12755,7 +11991,7 @@
           <a:bodyPr wrap="square" rtlCol="0" anchor="ctr"/>
           <a:lstStyle/>
           <a:p>
-            <a:pPr indent="0" marL="0">
+            <a:pPr marL="0" indent="0">
               <a:buNone/>
             </a:pPr>
             <a:r>
@@ -12794,7 +12030,7 @@
           <a:bodyPr wrap="square" rtlCol="0" anchor="ctr"/>
           <a:lstStyle/>
           <a:p>
-            <a:pPr indent="0" marL="0">
+            <a:pPr marL="0" indent="0">
               <a:buNone/>
             </a:pPr>
             <a:r>
@@ -12855,7 +12091,7 @@
           <a:bodyPr wrap="square" rtlCol="0" anchor="ctr"/>
           <a:lstStyle/>
           <a:p>
-            <a:pPr indent="0" marL="0">
+            <a:pPr marL="0" indent="0">
               <a:buNone/>
             </a:pPr>
             <a:r>
@@ -12894,7 +12130,7 @@
           <a:bodyPr wrap="square" rtlCol="0" anchor="ctr"/>
           <a:lstStyle/>
           <a:p>
-            <a:pPr indent="0" marL="0">
+            <a:pPr marL="0" indent="0">
               <a:buNone/>
             </a:pPr>
             <a:r>
@@ -12955,7 +12191,7 @@
           <a:bodyPr wrap="square" rtlCol="0" anchor="ctr"/>
           <a:lstStyle/>
           <a:p>
-            <a:pPr indent="0" marL="0">
+            <a:pPr marL="0" indent="0">
               <a:buNone/>
             </a:pPr>
             <a:r>
@@ -12994,7 +12230,7 @@
           <a:bodyPr wrap="square" rtlCol="0" anchor="ctr"/>
           <a:lstStyle/>
           <a:p>
-            <a:pPr indent="0" marL="0">
+            <a:pPr marL="0" indent="0">
               <a:buNone/>
             </a:pPr>
             <a:r>
@@ -13033,7 +12269,7 @@
           <a:bodyPr wrap="square" rtlCol="0" anchor="ctr"/>
           <a:lstStyle/>
           <a:p>
-            <a:pPr indent="0" marL="0">
+            <a:pPr marL="0" indent="0">
               <a:buNone/>
             </a:pPr>
             <a:r>
@@ -13072,7 +12308,7 @@
           <a:bodyPr wrap="square" rtlCol="0" anchor="ctr"/>
           <a:lstStyle/>
           <a:p>
-            <a:pPr algn="r" indent="0" marL="0">
+            <a:pPr marL="0" indent="0" algn="r">
               <a:buNone/>
             </a:pPr>
             <a:r>
@@ -13106,6 +12342,7 @@
         <a:solidFill>
           <a:srgbClr val="183774"/>
         </a:solidFill>
+        <a:effectLst/>
       </p:bgPr>
     </p:bg>
     <p:spTree>
@@ -13124,45 +12361,6 @@
       </p:grpSpPr>
       <p:sp>
         <p:nvSpPr>
-          <p:cNvPr id="2" name="Text 0"/>
-          <p:cNvSpPr/>
-          <p:nvPr/>
-        </p:nvSpPr>
-        <p:spPr>
-          <a:xfrm>
-            <a:off x="9509760" y="320040"/>
-            <a:ext cx="2377440" cy="365760"/>
-          </a:xfrm>
-          <a:prstGeom prst="rect">
-            <a:avLst/>
-          </a:prstGeom>
-          <a:noFill/>
-          <a:ln/>
-        </p:spPr>
-        <p:txBody>
-          <a:bodyPr wrap="square" rtlCol="0" anchor="ctr"/>
-          <a:lstStyle/>
-          <a:p>
-            <a:pPr algn="r" indent="0" marL="0">
-              <a:buNone/>
-            </a:pPr>
-            <a:r>
-              <a:rPr lang="en-US" sz="1400" b="1" spc="200" kern="0" dirty="0">
-                <a:solidFill>
-                  <a:srgbClr val="247DFF"/>
-                </a:solidFill>
-                <a:latin typeface="Arial" pitchFamily="34" charset="0"/>
-                <a:ea typeface="Arial" pitchFamily="34" charset="-122"/>
-                <a:cs typeface="Arial" pitchFamily="34" charset="-120"/>
-              </a:rPr>
-              <a:t>SYNAPTICS</a:t>
-            </a:r>
-            <a:endParaRPr lang="en-US" sz="1400" dirty="0"/>
-          </a:p>
-        </p:txBody>
-      </p:sp>
-      <p:sp>
-        <p:nvSpPr>
           <p:cNvPr id="3" name="Text 1"/>
           <p:cNvSpPr/>
           <p:nvPr/>
@@ -13182,11 +12380,11 @@
           <a:bodyPr wrap="square" rtlCol="0" anchor="ctr"/>
           <a:lstStyle/>
           <a:p>
-            <a:pPr indent="0" marL="0">
-              <a:buNone/>
-            </a:pPr>
-            <a:r>
-              <a:rPr lang="en-US" sz="1300" b="1" spc="100" kern="0" dirty="0">
+            <a:pPr marL="0" indent="0">
+              <a:buNone/>
+            </a:pPr>
+            <a:r>
+              <a:rPr lang="en-US" sz="1300" b="1" kern="0" spc="100" dirty="0">
                 <a:solidFill>
                   <a:srgbClr val="247DFF"/>
                 </a:solidFill>
@@ -13221,7 +12419,7 @@
           <a:bodyPr wrap="square" rtlCol="0" anchor="ctr"/>
           <a:lstStyle/>
           <a:p>
-            <a:pPr indent="0" marL="0">
+            <a:pPr marL="0" indent="0">
               <a:buNone/>
             </a:pPr>
             <a:r>
@@ -13282,7 +12480,7 @@
           <a:bodyPr wrap="square" rtlCol="0" anchor="ctr"/>
           <a:lstStyle/>
           <a:p>
-            <a:pPr indent="0" marL="0">
+            <a:pPr marL="0" indent="0">
               <a:buNone/>
             </a:pPr>
             <a:r>
@@ -13321,7 +12519,7 @@
           <a:bodyPr wrap="square" rtlCol="0" anchor="ctr"/>
           <a:lstStyle/>
           <a:p>
-            <a:pPr indent="0" marL="0">
+            <a:pPr marL="0" indent="0">
               <a:buNone/>
             </a:pPr>
             <a:r>
@@ -13382,7 +12580,7 @@
           <a:bodyPr wrap="square" rtlCol="0" anchor="ctr"/>
           <a:lstStyle/>
           <a:p>
-            <a:pPr indent="0" marL="0">
+            <a:pPr marL="0" indent="0">
               <a:buNone/>
             </a:pPr>
             <a:r>
@@ -13421,7 +12619,7 @@
           <a:bodyPr wrap="square" rtlCol="0" anchor="ctr"/>
           <a:lstStyle/>
           <a:p>
-            <a:pPr indent="0" marL="0">
+            <a:pPr marL="0" indent="0">
               <a:buNone/>
             </a:pPr>
             <a:r>
@@ -13482,7 +12680,7 @@
           <a:bodyPr wrap="square" rtlCol="0" anchor="ctr"/>
           <a:lstStyle/>
           <a:p>
-            <a:pPr indent="0" marL="0">
+            <a:pPr marL="0" indent="0">
               <a:buNone/>
             </a:pPr>
             <a:r>
@@ -13521,7 +12719,7 @@
           <a:bodyPr wrap="square" rtlCol="0" anchor="ctr"/>
           <a:lstStyle/>
           <a:p>
-            <a:pPr indent="0" marL="0">
+            <a:pPr marL="0" indent="0">
               <a:buNone/>
             </a:pPr>
             <a:r>
@@ -13582,7 +12780,7 @@
           <a:bodyPr wrap="square" rtlCol="0" anchor="ctr"/>
           <a:lstStyle/>
           <a:p>
-            <a:pPr indent="0" marL="0">
+            <a:pPr marL="0" indent="0">
               <a:buNone/>
             </a:pPr>
             <a:r>
@@ -13621,7 +12819,7 @@
           <a:bodyPr wrap="square" rtlCol="0" anchor="ctr"/>
           <a:lstStyle/>
           <a:p>
-            <a:pPr indent="0" marL="0">
+            <a:pPr marL="0" indent="0">
               <a:buNone/>
             </a:pPr>
             <a:r>
@@ -13682,7 +12880,7 @@
           <a:bodyPr wrap="square" rtlCol="0" anchor="ctr"/>
           <a:lstStyle/>
           <a:p>
-            <a:pPr indent="0" marL="0">
+            <a:pPr marL="0" indent="0">
               <a:buNone/>
             </a:pPr>
             <a:r>
@@ -13721,7 +12919,7 @@
           <a:bodyPr wrap="square" rtlCol="0" anchor="ctr"/>
           <a:lstStyle/>
           <a:p>
-            <a:pPr indent="0" marL="0">
+            <a:pPr marL="0" indent="0">
               <a:buNone/>
             </a:pPr>
             <a:r>
@@ -13782,7 +12980,7 @@
           <a:bodyPr wrap="square" rtlCol="0" anchor="ctr"/>
           <a:lstStyle/>
           <a:p>
-            <a:pPr indent="0" marL="0">
+            <a:pPr marL="0" indent="0">
               <a:buNone/>
             </a:pPr>
             <a:r>
@@ -13821,7 +13019,7 @@
           <a:bodyPr wrap="square" rtlCol="0" anchor="ctr"/>
           <a:lstStyle/>
           <a:p>
-            <a:pPr indent="0" marL="0">
+            <a:pPr marL="0" indent="0">
               <a:buNone/>
             </a:pPr>
             <a:r>
@@ -13860,7 +13058,7 @@
           <a:bodyPr wrap="square" rtlCol="0" anchor="ctr"/>
           <a:lstStyle/>
           <a:p>
-            <a:pPr indent="0" marL="0">
+            <a:pPr marL="0" indent="0">
               <a:buNone/>
             </a:pPr>
             <a:r>
@@ -13899,7 +13097,7 @@
           <a:bodyPr wrap="square" rtlCol="0" anchor="ctr"/>
           <a:lstStyle/>
           <a:p>
-            <a:pPr algn="r" indent="0" marL="0">
+            <a:pPr marL="0" indent="0" algn="r">
               <a:buNone/>
             </a:pPr>
             <a:r>
@@ -14218,4 +13416,265 @@
     </a:ext>
   </a:extLst>
 </a:theme>
+</file>
+
+<file path=ppt/theme/theme2.xml><?xml version="1.0" encoding="utf-8"?>
+<a:theme xmlns:a="http://schemas.openxmlformats.org/drawingml/2006/main" name="Office 테마">
+  <a:themeElements>
+    <a:clrScheme name="Office">
+      <a:dk1>
+        <a:sysClr val="windowText" lastClr="000000"/>
+      </a:dk1>
+      <a:lt1>
+        <a:sysClr val="window" lastClr="FFFFFF"/>
+      </a:lt1>
+      <a:dk2>
+        <a:srgbClr val="44546A"/>
+      </a:dk2>
+      <a:lt2>
+        <a:srgbClr val="E7E6E6"/>
+      </a:lt2>
+      <a:accent1>
+        <a:srgbClr val="5B9BD5"/>
+      </a:accent1>
+      <a:accent2>
+        <a:srgbClr val="ED7D31"/>
+      </a:accent2>
+      <a:accent3>
+        <a:srgbClr val="A5A5A5"/>
+      </a:accent3>
+      <a:accent4>
+        <a:srgbClr val="FFC000"/>
+      </a:accent4>
+      <a:accent5>
+        <a:srgbClr val="4472C4"/>
+      </a:accent5>
+      <a:accent6>
+        <a:srgbClr val="70AD47"/>
+      </a:accent6>
+      <a:hlink>
+        <a:srgbClr val="0563C1"/>
+      </a:hlink>
+      <a:folHlink>
+        <a:srgbClr val="954F72"/>
+      </a:folHlink>
+    </a:clrScheme>
+    <a:fontScheme name="Office">
+      <a:majorFont>
+        <a:latin typeface="맑은 고딕" panose="020F0302020204030204"/>
+        <a:ea typeface=""/>
+        <a:cs typeface=""/>
+        <a:font script="Jpan" typeface="游ゴシック Light"/>
+        <a:font script="Hang" typeface="맑은 고딕"/>
+        <a:font script="Hans" typeface="等线 Light"/>
+        <a:font script="Hant" typeface="新細明體"/>
+        <a:font script="Arab" typeface="Times New Roman"/>
+        <a:font script="Hebr" typeface="Times New Roman"/>
+        <a:font script="Thai" typeface="Angsana New"/>
+        <a:font script="Ethi" typeface="Nyala"/>
+        <a:font script="Beng" typeface="Vrinda"/>
+        <a:font script="Gujr" typeface="Shruti"/>
+        <a:font script="Khmr" typeface="MoolBoran"/>
+        <a:font script="Knda" typeface="Tunga"/>
+        <a:font script="Guru" typeface="Raavi"/>
+        <a:font script="Cans" typeface="Euphemia"/>
+        <a:font script="Cher" typeface="Plantagenet Cherokee"/>
+        <a:font script="Yiii" typeface="Microsoft Yi Baiti"/>
+        <a:font script="Tibt" typeface="Microsoft Himalaya"/>
+        <a:font script="Thaa" typeface="MV Boli"/>
+        <a:font script="Deva" typeface="Mangal"/>
+        <a:font script="Telu" typeface="Gautami"/>
+        <a:font script="Taml" typeface="Latha"/>
+        <a:font script="Syrc" typeface="Estrangelo Edessa"/>
+        <a:font script="Orya" typeface="Kalinga"/>
+        <a:font script="Mlym" typeface="Kartika"/>
+        <a:font script="Laoo" typeface="DokChampa"/>
+        <a:font script="Sinh" typeface="Iskoola Pota"/>
+        <a:font script="Mong" typeface="Mongolian Baiti"/>
+        <a:font script="Viet" typeface="Times New Roman"/>
+        <a:font script="Uigh" typeface="Microsoft Uighur"/>
+        <a:font script="Geor" typeface="Sylfaen"/>
+      </a:majorFont>
+      <a:minorFont>
+        <a:latin typeface="맑은 고딕" panose="020F0502020204030204"/>
+        <a:ea typeface=""/>
+        <a:cs typeface=""/>
+        <a:font script="Jpan" typeface="游ゴシック"/>
+        <a:font script="Hang" typeface="맑은 고딕"/>
+        <a:font script="Hans" typeface="等线"/>
+        <a:font script="Hant" typeface="新細明體"/>
+        <a:font script="Arab" typeface="Arial"/>
+        <a:font script="Hebr" typeface="Arial"/>
+        <a:font script="Thai" typeface="Cordia New"/>
+        <a:font script="Ethi" typeface="Nyala"/>
+        <a:font script="Beng" typeface="Vrinda"/>
+        <a:font script="Gujr" typeface="Shruti"/>
+        <a:font script="Khmr" typeface="DaunPenh"/>
+        <a:font script="Knda" typeface="Tunga"/>
+        <a:font script="Guru" typeface="Raavi"/>
+        <a:font script="Cans" typeface="Euphemia"/>
+        <a:font script="Cher" typeface="Plantagenet Cherokee"/>
+        <a:font script="Yiii" typeface="Microsoft Yi Baiti"/>
+        <a:font script="Tibt" typeface="Microsoft Himalaya"/>
+        <a:font script="Thaa" typeface="MV Boli"/>
+        <a:font script="Deva" typeface="Mangal"/>
+        <a:font script="Telu" typeface="Gautami"/>
+        <a:font script="Taml" typeface="Latha"/>
+        <a:font script="Syrc" typeface="Estrangelo Edessa"/>
+        <a:font script="Orya" typeface="Kalinga"/>
+        <a:font script="Mlym" typeface="Kartika"/>
+        <a:font script="Laoo" typeface="DokChampa"/>
+        <a:font script="Sinh" typeface="Iskoola Pota"/>
+        <a:font script="Mong" typeface="Mongolian Baiti"/>
+        <a:font script="Viet" typeface="Arial"/>
+        <a:font script="Uigh" typeface="Microsoft Uighur"/>
+        <a:font script="Geor" typeface="Sylfaen"/>
+      </a:minorFont>
+    </a:fontScheme>
+    <a:fmtScheme name="Office">
+      <a:fillStyleLst>
+        <a:solidFill>
+          <a:schemeClr val="phClr"/>
+        </a:solidFill>
+        <a:gradFill rotWithShape="1">
+          <a:gsLst>
+            <a:gs pos="0">
+              <a:schemeClr val="phClr">
+                <a:lumMod val="110000"/>
+                <a:satMod val="105000"/>
+                <a:tint val="67000"/>
+              </a:schemeClr>
+            </a:gs>
+            <a:gs pos="50000">
+              <a:schemeClr val="phClr">
+                <a:lumMod val="105000"/>
+                <a:satMod val="103000"/>
+                <a:tint val="73000"/>
+              </a:schemeClr>
+            </a:gs>
+            <a:gs pos="100000">
+              <a:schemeClr val="phClr">
+                <a:lumMod val="105000"/>
+                <a:satMod val="109000"/>
+                <a:tint val="81000"/>
+              </a:schemeClr>
+            </a:gs>
+          </a:gsLst>
+          <a:lin ang="5400000" scaled="0"/>
+        </a:gradFill>
+        <a:gradFill rotWithShape="1">
+          <a:gsLst>
+            <a:gs pos="0">
+              <a:schemeClr val="phClr">
+                <a:satMod val="103000"/>
+                <a:lumMod val="102000"/>
+                <a:tint val="94000"/>
+              </a:schemeClr>
+            </a:gs>
+            <a:gs pos="50000">
+              <a:schemeClr val="phClr">
+                <a:satMod val="110000"/>
+                <a:lumMod val="100000"/>
+                <a:shade val="100000"/>
+              </a:schemeClr>
+            </a:gs>
+            <a:gs pos="100000">
+              <a:schemeClr val="phClr">
+                <a:lumMod val="99000"/>
+                <a:satMod val="120000"/>
+                <a:shade val="78000"/>
+              </a:schemeClr>
+            </a:gs>
+          </a:gsLst>
+          <a:lin ang="5400000" scaled="0"/>
+        </a:gradFill>
+      </a:fillStyleLst>
+      <a:lnStyleLst>
+        <a:ln w="6350" cap="flat" cmpd="sng" algn="ctr">
+          <a:solidFill>
+            <a:schemeClr val="phClr"/>
+          </a:solidFill>
+          <a:prstDash val="solid"/>
+          <a:miter lim="800000"/>
+        </a:ln>
+        <a:ln w="12700" cap="flat" cmpd="sng" algn="ctr">
+          <a:solidFill>
+            <a:schemeClr val="phClr"/>
+          </a:solidFill>
+          <a:prstDash val="solid"/>
+          <a:miter lim="800000"/>
+        </a:ln>
+        <a:ln w="19050" cap="flat" cmpd="sng" algn="ctr">
+          <a:solidFill>
+            <a:schemeClr val="phClr"/>
+          </a:solidFill>
+          <a:prstDash val="solid"/>
+          <a:miter lim="800000"/>
+        </a:ln>
+      </a:lnStyleLst>
+      <a:effectStyleLst>
+        <a:effectStyle>
+          <a:effectLst/>
+        </a:effectStyle>
+        <a:effectStyle>
+          <a:effectLst/>
+        </a:effectStyle>
+        <a:effectStyle>
+          <a:effectLst>
+            <a:outerShdw blurRad="57150" dist="19050" dir="5400000" algn="ctr" rotWithShape="0">
+              <a:srgbClr val="000000">
+                <a:alpha val="63000"/>
+              </a:srgbClr>
+            </a:outerShdw>
+          </a:effectLst>
+        </a:effectStyle>
+      </a:effectStyleLst>
+      <a:bgFillStyleLst>
+        <a:solidFill>
+          <a:schemeClr val="phClr"/>
+        </a:solidFill>
+        <a:solidFill>
+          <a:schemeClr val="phClr">
+            <a:tint val="95000"/>
+            <a:satMod val="170000"/>
+          </a:schemeClr>
+        </a:solidFill>
+        <a:gradFill rotWithShape="1">
+          <a:gsLst>
+            <a:gs pos="0">
+              <a:schemeClr val="phClr">
+                <a:tint val="93000"/>
+                <a:satMod val="150000"/>
+                <a:shade val="98000"/>
+                <a:lumMod val="102000"/>
+              </a:schemeClr>
+            </a:gs>
+            <a:gs pos="50000">
+              <a:schemeClr val="phClr">
+                <a:tint val="98000"/>
+                <a:satMod val="130000"/>
+                <a:shade val="90000"/>
+                <a:lumMod val="103000"/>
+              </a:schemeClr>
+            </a:gs>
+            <a:gs pos="100000">
+              <a:schemeClr val="phClr">
+                <a:shade val="63000"/>
+                <a:satMod val="120000"/>
+              </a:schemeClr>
+            </a:gs>
+          </a:gsLst>
+          <a:lin ang="5400000" scaled="0"/>
+        </a:gradFill>
+      </a:bgFillStyleLst>
+    </a:fmtScheme>
+  </a:themeElements>
+  <a:objectDefaults/>
+  <a:extraClrSchemeLst/>
+  <a:extLst>
+    <a:ext uri="{05A4C25C-085E-4340-85A3-A5531E510DB2}">
+      <thm15:themeFamily xmlns:thm15="http://schemas.microsoft.com/office/thememl/2012/main" name="Office Theme" id="{62F939B6-93AF-4DB8-9C6B-D6C7DFDC589F}" vid="{4A3C46E8-61CC-4603-A589-7422A47A8E4A}"/>
+    </a:ext>
+  </a:extLst>
+</a:theme>
 </file>